--- a/10-Knowledge-Products/KP1-GEA/videos/module_2/en/decks/KP1_M2_2.2_Deck_v0.2.pptx
+++ b/10-Knowledge-Products/KP1-GEA/videos/module_2/en/decks/KP1_M2_2.2_Deck_v0.2.pptx
@@ -14,8 +14,6 @@
     <p:handoutMasterId r:id="rId47"/>
   </p:handoutMasterIdLst>
   <p:sldIdLst>
-    <p:sldId id="2681" r:id="rId8"/>
-    <p:sldId id="2703" r:id="rId25"/>
     <p:sldId id="2704" r:id="rId26"/>
     <p:sldId id="2705" r:id="rId27"/>
     <p:sldId id="2706" r:id="rId28"/>
@@ -23,6 +21,8 @@
     <p:sldId id="2708" r:id="rId30"/>
     <p:sldId id="2709" r:id="rId31"/>
     <p:sldId id="2710" r:id="rId32"/>
+    <p:sldId id="2711" r:id="rId33"/>
+    <p:sldId id="2712" r:id="rId34"/>
   </p:sldIdLst>
   <p:sldSz cx="12192000" cy="6858000"/>
   <p:notesSz cx="6858000" cy="9144000"/>
@@ -889,76 +889,6 @@
 </p:notesMaster>
 </file>
 
-<file path=ppt/notesSlides/notesSlide10.xml><?xml version="1.0" encoding="utf-8"?>
-<p:notes xmlns:a="http://schemas.openxmlformats.org/drawingml/2006/main" xmlns:p="http://schemas.openxmlformats.org/presentationml/2006/main" xmlns:r="http://schemas.openxmlformats.org/officeDocument/2006/relationships">
-  <p:cSld>
-    <p:spTree>
-      <p:nvGrpSpPr>
-        <p:cNvPr id="1" name=""/>
-        <p:cNvGrpSpPr/>
-        <p:nvPr/>
-      </p:nvGrpSpPr>
-      <p:grpSpPr>
-        <a:xfrm>
-          <a:off x="0" y="0"/>
-          <a:ext cx="0" cy="0"/>
-          <a:chOff x="0" y="0"/>
-          <a:chExt cx="0" cy="0"/>
-        </a:xfrm>
-      </p:grpSpPr>
-      <p:sp>
-        <p:nvSpPr>
-          <p:cNvPr id="2" name="Slide Image Placeholder 1"/>
-          <p:cNvSpPr>
-            <a:spLocks noGrp="1"/>
-          </p:cNvSpPr>
-          <p:nvPr>
-            <p:ph type="sldImg" idx="2"/>
-          </p:nvPr>
-        </p:nvSpPr>
-        <p:spPr/>
-      </p:sp>
-      <p:sp>
-        <p:nvSpPr>
-          <p:cNvPr id="3" name="Notes Placeholder 2"/>
-          <p:cNvSpPr>
-            <a:spLocks noGrp="1"/>
-          </p:cNvSpPr>
-          <p:nvPr>
-            <p:ph type="body" idx="3" sz="quarter"/>
-          </p:nvPr>
-        </p:nvSpPr>
-        <p:spPr/>
-        <p:txBody>
-          <a:bodyPr/>
-          <a:lstStyle/>
-          <a:p>
-            <a:r>
-              <a:t>VO, slide 1: Two ministries each hand you an architecture. One calls a thing a 'service'; the other calls the same thing a 'function'. One ministry's 'application' is another's 'system'. You cannot compare them, connect them, or tell whether they are doing the same work twice.</a:t>
-            </a:r>
-          </a:p>
-        </p:txBody>
-      </p:sp>
-      <p:sp>
-        <p:nvSpPr>
-          <p:cNvPr id="4" name="Slide Number Placeholder 3"/>
-          <p:cNvSpPr>
-            <a:spLocks noGrp="1"/>
-          </p:cNvSpPr>
-          <p:nvPr>
-            <p:ph type="sldNum" idx="5" sz="quarter"/>
-          </p:nvPr>
-        </p:nvSpPr>
-        <p:spPr/>
-      </p:sp>
-    </p:spTree>
-  </p:cSld>
-  <p:clrMapOvr>
-    <a:masterClrMapping/>
-  </p:clrMapOvr>
-</p:notes>
-</file>
-
 <file path=ppt/notesSlides/notesSlide11.xml><?xml version="1.0" encoding="utf-8"?>
 <p:notes xmlns:a="http://schemas.openxmlformats.org/drawingml/2006/main" xmlns:p="http://schemas.openxmlformats.org/presentationml/2006/main" xmlns:r="http://schemas.openxmlformats.org/officeDocument/2006/relationships">
   <p:cSld>
@@ -1004,13 +934,7 @@
           <a:lstStyle/>
           <a:p>
             <a:r>
-              <a:t>VO: The fix is a metamodel. A metamodel is a small, shared dictionary. It names the kinds of boxes everyone is allowed to draw, and it defines each one in plain words. PAERA defines them for you. A Capability — something a public body can do. A Service — how that capability reaches a citizen or another body. An Application — the software that supports a capability. A Data Domain — a kind of information, with one owner. A Technology Component — the infrastructure underneath. And the Organisation that owns each of these. Five or six entity types. That is most of the metamodel.</a:t>
-            </a:r>
-          </a:p>
-          <a:p/>
-          <a:p>
-            <a:r>
-              <a:t>The core reference slide of the video — keep it on screen while the definitions are read.</a:t>
+              <a:t>Title card — the cold open. The hosts name the module, the video number, the title and the single message on this slide; no scripted narration. Hold until the opener begins; the opener is narrated on the next slide.</a:t>
             </a:r>
           </a:p>
         </p:txBody>
@@ -1080,13 +1004,7 @@
           <a:lstStyle/>
           <a:p>
             <a:r>
-              <a:t>VO: The entities are half of it. The relationships are the other half. A Capability is delivered by a Service. A Capability is supported by an Application. An Application uses a Data Domain. Everything runs on a Technology Component. An Organisation owns each of these. These relationships are fixed. You do not invent them per ministry. Once every team uses the same entities and the same relationships, every ministry's picture can be laid over every other ministry's picture — and they line up.</a:t>
-            </a:r>
-          </a:p>
-          <a:p/>
-          <a:p>
-            <a:r>
-              <a:t>On screen: the metamodel drawn as a graph — arrows are the relationships; Technology is the base everything stands on; Organisation brackets the lot as owner. Reveal the arrows in the order the VO names them.</a:t>
+              <a:t>VO: Two ministries each hand you an architecture. One calls a thing a 'service'; the other calls the same thing a 'function'. One ministry's 'application' is another's 'system'. You cannot compare them, connect them, or tell whether they are doing the same work twice.</a:t>
             </a:r>
           </a:p>
         </p:txBody>
@@ -1156,13 +1074,13 @@
           <a:lstStyle/>
           <a:p>
             <a:r>
-              <a:t>VO: This is the part that matters most. Everyone says they want re-use — one identity system, used by many ministries, instead of five. But re-use is not a matter of good intentions. Before the agriculture ministry can consume the identity authority's building block, both must describe that building block the same way — same entity type, same relationships, same data domain. If each ministry models in its own private language, re-use is impossible even when everyone wants it. The metamodel is the precondition for re-use. It is the quiet, unglamorous thing that makes the whole-of-government saving — first ministry builds it, the rest consume it — actually achievable, instead of just hoped for.</a:t>
+              <a:t>VO: The fix is a metamodel. A metamodel is a small, shared dictionary. It names the kinds of boxes everyone is allowed to draw, and it defines each one in plain words. PAERA defines them for you. A Capability — something a public body can do. A Service — how that capability reaches a citizen or another body. An Application — the software that supports a capability. A Data Domain — a kind of information, with one owner. A Technology Component — the infrastructure underneath. And the Organisation that owns each of these. Five or six entity types. That is most of the metamodel.</a:t>
             </a:r>
           </a:p>
           <a:p/>
           <a:p>
             <a:r>
-              <a:t>The pivotal slide of 2.2. Hold it.</a:t>
+              <a:t>The core reference slide of the video — keep it on screen while the definitions are read.</a:t>
             </a:r>
           </a:p>
         </p:txBody>
@@ -1232,7 +1150,13 @@
           <a:lstStyle/>
           <a:p>
             <a:r>
-              <a:t>VO: The metamodel does a second job. The work of redesigning how a ministry serves citizens needs the business side — the minister, the director-general, the head of policy — and the IT side — you and your engineers — to decide together. They do not share a language. The metamodel gives them one. When the head of policy says 'we want to register every learner once', and you answer 'that is one Capability, one Service, and one Data Domain owned by the learner registry', you have translated a policy goal into an architecture — in words both sides can hold. The metamodel is the bridge. The same few entities that let two ministries connect also let business and IT understand each other.</a:t>
+              <a:t>VO: The entities are half of it. The relationships are the other half. A Capability is delivered by a Service. A Capability is supported by an Application. An Application uses a Data Domain. Everything runs on a Technology Component. An Organisation owns each of these. These relationships are fixed. You do not invent them per ministry. Once every team uses the same entities and the same relationships, every ministry's picture can be laid over every other ministry's picture — and they line up.</a:t>
+            </a:r>
+          </a:p>
+          <a:p/>
+          <a:p>
+            <a:r>
+              <a:t>On screen: the metamodel drawn as a graph — arrows are the relationships; Technology is the base everything stands on; Organisation brackets the lot as owner. Reveal the arrows in the order the VO names them.</a:t>
             </a:r>
           </a:p>
         </p:txBody>
@@ -1302,13 +1226,13 @@
           <a:lstStyle/>
           <a:p>
             <a:r>
-              <a:t>VO: You do not design the metamodel: PAERA publishes it in Annex 2, already worked out across many countries, so you adopt it from day one and extend it only where your country genuinely needs an entity PAERA does not have — deliberately, and written down so every team shares it.</a:t>
+              <a:t>VO: This is the part that matters most. Everyone says they want re-use — one identity system, used by many ministries, instead of five. But re-use is not a matter of good intentions. Before the agriculture ministry can consume the identity authority's building block, both must describe that building block the same way — same entity type, same relationships, same data domain. If each ministry models in its own private language, re-use is impossible even when everyone wants it. The metamodel is the precondition for re-use. It is the quiet, unglamorous thing that makes the whole-of-government saving — first ministry builds it, the rest consume it — actually achievable, instead of just hoped for.</a:t>
             </a:r>
           </a:p>
           <a:p/>
           <a:p>
             <a:r>
-              <a:t>One sentence of narration for three rows — reveal all three together and let the slide carry them.</a:t>
+              <a:t>The pivotal slide of 2.2. Hold it.</a:t>
             </a:r>
           </a:p>
         </p:txBody>
@@ -1378,13 +1302,7 @@
           <a:lstStyle/>
           <a:p>
             <a:r>
-              <a:t>PRACTICE BOX (on-screen only — never read it, never paraphrase it, never point at it). It replaces the narrated handoff: this video ends on the recap and the Sources slide.</a:t>
-            </a:r>
-          </a:p>
-          <a:p/>
-          <a:p>
-            <a:r>
-              <a:t>VO: The metamodel is the small shared dictionary that lets two ministries' architectures fit together, and lets business and IT understand each other — what turns re-use from a wish into a plan.</a:t>
+              <a:t>VO: The metamodel does a second job. The work of redesigning how a ministry serves citizens needs the business side — the minister, the director-general, the head of policy — and the IT side — you and your engineers — to decide together. They do not share a language. The metamodel gives them one. When the head of policy says 'we want to register every learner once', and you answer 'that is one Capability, one Service, and one Data Domain owned by the learner registry', you have translated a policy goal into an architecture — in words both sides can hold. The metamodel is the bridge. The same few entities that let two ministries connect also let business and IT understand each other.</a:t>
             </a:r>
           </a:p>
         </p:txBody>
@@ -1454,7 +1372,13 @@
           <a:lstStyle/>
           <a:p>
             <a:r>
-              <a:t>Sources slide, held ~5 seconds at the end of the video. Links are compiled into the YouTube description per ITU convention; no URLs read aloud.</a:t>
+              <a:t>VO: You do not design the metamodel: PAERA publishes it in Annex 2, already worked out across many countries, so you adopt it from day one and extend it only where your country genuinely needs an entity PAERA does not have — deliberately, and written down so every team shares it.</a:t>
+            </a:r>
+          </a:p>
+          <a:p/>
+          <a:p>
+            <a:r>
+              <a:t>One sentence of narration for three rows — reveal all three together and let the slide carry them.</a:t>
             </a:r>
           </a:p>
         </p:txBody>
@@ -1479,7 +1403,7 @@
 </p:notes>
 </file>
 
-<file path=ppt/notesSlides/notesSlide21.xml><?xml version="1.0" encoding="utf-8"?>
+<file path=ppt/notesSlides/notesSlide18.xml><?xml version="1.0" encoding="utf-8"?>
 <p:notes xmlns:a="http://schemas.openxmlformats.org/drawingml/2006/main" xmlns:p="http://schemas.openxmlformats.org/presentationml/2006/main" xmlns:r="http://schemas.openxmlformats.org/officeDocument/2006/relationships">
   <p:cSld>
     <p:spTree>
@@ -1524,7 +1448,83 @@
           <a:lstStyle/>
           <a:p>
             <a:r>
-              <a:t>Title card for standalone video 2.2. Content slides are identical to the corresponding section of the combined deck KP1_M2_Deck_v0.2.pptx; voice-over is in each slide’s notes.</a:t>
+              <a:t>PRACTICE BOX (on-screen only — never read it, never paraphrase it, never point at it). It replaces the narrated handoff: this video ends on the recap and the Sources slide.</a:t>
+            </a:r>
+          </a:p>
+          <a:p/>
+          <a:p>
+            <a:r>
+              <a:t>VO: The metamodel is the small shared dictionary that lets two ministries' architectures fit together, and lets business and IT understand each other — what turns re-use from a wish into a plan.</a:t>
+            </a:r>
+          </a:p>
+        </p:txBody>
+      </p:sp>
+      <p:sp>
+        <p:nvSpPr>
+          <p:cNvPr id="4" name="Slide Number Placeholder 3"/>
+          <p:cNvSpPr>
+            <a:spLocks noGrp="1"/>
+          </p:cNvSpPr>
+          <p:nvPr>
+            <p:ph type="sldNum" idx="5" sz="quarter"/>
+          </p:nvPr>
+        </p:nvSpPr>
+        <p:spPr/>
+      </p:sp>
+    </p:spTree>
+  </p:cSld>
+  <p:clrMapOvr>
+    <a:masterClrMapping/>
+  </p:clrMapOvr>
+</p:notes>
+</file>
+
+<file path=ppt/notesSlides/notesSlide19.xml><?xml version="1.0" encoding="utf-8"?>
+<p:notes xmlns:a="http://schemas.openxmlformats.org/drawingml/2006/main" xmlns:p="http://schemas.openxmlformats.org/presentationml/2006/main" xmlns:r="http://schemas.openxmlformats.org/officeDocument/2006/relationships">
+  <p:cSld>
+    <p:spTree>
+      <p:nvGrpSpPr>
+        <p:cNvPr id="1" name=""/>
+        <p:cNvGrpSpPr/>
+        <p:nvPr/>
+      </p:nvGrpSpPr>
+      <p:grpSpPr>
+        <a:xfrm>
+          <a:off x="0" y="0"/>
+          <a:ext cx="0" cy="0"/>
+          <a:chOff x="0" y="0"/>
+          <a:chExt cx="0" cy="0"/>
+        </a:xfrm>
+      </p:grpSpPr>
+      <p:sp>
+        <p:nvSpPr>
+          <p:cNvPr id="2" name="Slide Image Placeholder 1"/>
+          <p:cNvSpPr>
+            <a:spLocks noGrp="1"/>
+          </p:cNvSpPr>
+          <p:nvPr>
+            <p:ph type="sldImg" idx="2"/>
+          </p:nvPr>
+        </p:nvSpPr>
+        <p:spPr/>
+      </p:sp>
+      <p:sp>
+        <p:nvSpPr>
+          <p:cNvPr id="3" name="Notes Placeholder 2"/>
+          <p:cNvSpPr>
+            <a:spLocks noGrp="1"/>
+          </p:cNvSpPr>
+          <p:nvPr>
+            <p:ph type="body" idx="3" sz="quarter"/>
+          </p:nvPr>
+        </p:nvSpPr>
+        <p:spPr/>
+        <p:txBody>
+          <a:bodyPr/>
+          <a:lstStyle/>
+          <a:p>
+            <a:r>
+              <a:t>Sources slide, held ~5 seconds at the end of the video. Links are compiled into the YouTube description per ITU convention; no URLs read aloud.</a:t>
             </a:r>
           </a:p>
         </p:txBody>
@@ -11685,851 +11685,6 @@
 </p:sldMaster>
 </file>
 
-<file path=ppt/slides/slide1.xml><?xml version="1.0" encoding="utf-8"?>
-<p:sld xmlns:a="http://schemas.openxmlformats.org/drawingml/2006/main" xmlns:r="http://schemas.openxmlformats.org/officeDocument/2006/relationships" xmlns:p="http://schemas.openxmlformats.org/presentationml/2006/main">
-  <p:cSld>
-    <p:spTree>
-      <p:nvGrpSpPr>
-        <p:cNvPr id="1" name=""/>
-        <p:cNvGrpSpPr/>
-        <p:nvPr/>
-      </p:nvGrpSpPr>
-      <p:grpSpPr>
-        <a:xfrm>
-          <a:off x="0" y="0"/>
-          <a:ext cx="0" cy="0"/>
-          <a:chOff x="0" y="0"/>
-          <a:chExt cx="0" cy="0"/>
-        </a:xfrm>
-      </p:grpSpPr>
-      <p:cxnSp>
-        <p:nvCxnSpPr>
-          <p:cNvPr id="11" name="Straight Connector 10">
-            <a:extLst>
-              <a:ext uri="{FF2B5EF4-FFF2-40B4-BE49-F238E27FC236}">
-                <a16:creationId xmlns:a16="http://schemas.microsoft.com/office/drawing/2014/main" id="{D9AD66F2-F7C0-4D03-9150-D28F17AC561D}"/>
-              </a:ext>
-            </a:extLst>
-          </p:cNvPr>
-          <p:cNvCxnSpPr>
-            <a:cxnSpLocks/>
-          </p:cNvCxnSpPr>
-          <p:nvPr/>
-        </p:nvCxnSpPr>
-        <p:spPr>
-          <a:xfrm>
-            <a:off x="373021" y="2198718"/>
-            <a:ext cx="6843567" cy="0"/>
-          </a:xfrm>
-          <a:prstGeom prst="line">
-            <a:avLst/>
-          </a:prstGeom>
-          <a:ln w="12700">
-            <a:solidFill>
-              <a:srgbClr val="009CD6"/>
-            </a:solidFill>
-          </a:ln>
-        </p:spPr>
-        <p:style>
-          <a:lnRef idx="1">
-            <a:schemeClr val="accent1"/>
-          </a:lnRef>
-          <a:fillRef idx="0">
-            <a:schemeClr val="accent1"/>
-          </a:fillRef>
-          <a:effectRef idx="0">
-            <a:schemeClr val="accent1"/>
-          </a:effectRef>
-          <a:fontRef idx="minor">
-            <a:schemeClr val="tx1"/>
-          </a:fontRef>
-        </p:style>
-      </p:cxnSp>
-      <p:sp>
-        <p:nvSpPr>
-          <p:cNvPr id="12" name="Title 9">
-            <a:extLst>
-              <a:ext uri="{FF2B5EF4-FFF2-40B4-BE49-F238E27FC236}">
-                <a16:creationId xmlns:a16="http://schemas.microsoft.com/office/drawing/2014/main" id="{EEB08032-CE0E-4986-AEDF-A41026C0E8B9}"/>
-              </a:ext>
-            </a:extLst>
-          </p:cNvPr>
-          <p:cNvSpPr txBox="1">
-            <a:spLocks/>
-          </p:cNvSpPr>
-          <p:nvPr/>
-        </p:nvSpPr>
-        <p:spPr>
-          <a:xfrm>
-            <a:off x="237734" y="702833"/>
-            <a:ext cx="6432007" cy="1218817"/>
-          </a:xfrm>
-          <a:prstGeom prst="rect">
-            <a:avLst/>
-          </a:prstGeom>
-        </p:spPr>
-        <p:txBody>
-          <a:bodyPr anchor="b">
-            <a:noAutofit/>
-          </a:bodyPr>
-          <a:lstStyle>
-            <a:lvl1pPr algn="l" defTabSz="914400" rtl="0" eaLnBrk="1" latinLnBrk="0" hangingPunct="1">
-              <a:lnSpc>
-                <a:spcPct val="90000"/>
-              </a:lnSpc>
-              <a:spcBef>
-                <a:spcPct val="0"/>
-              </a:spcBef>
-              <a:buNone/>
-              <a:defRPr sz="4000" kern="1200">
-                <a:solidFill>
-                  <a:schemeClr val="bg1"/>
-                </a:solidFill>
-                <a:latin typeface="Arial" panose="020B0604020202020204" pitchFamily="34" charset="0"/>
-                <a:ea typeface="+mj-ea"/>
-                <a:cs typeface="Arial" panose="020B0604020202020204" pitchFamily="34" charset="0"/>
-              </a:defRPr>
-            </a:lvl1pPr>
-          </a:lstStyle>
-          <a:p>
-            <a:r>
-              <a:rPr sz="2400" b="1" i="0">
-                <a:solidFill>
-                  <a:srgbClr val="1A1A1A"/>
-                </a:solidFill>
-                <a:latin typeface="Arial"/>
-              </a:rPr>
-              <a:t>2.2 — The shared vocabulary that makes re-use possible</a:t>
-            </a:r>
-          </a:p>
-        </p:txBody>
-      </p:sp>
-      <p:pic>
-        <p:nvPicPr>
-          <p:cNvPr id="7" name="Picture 6">
-            <a:extLst>
-              <a:ext uri="{FF2B5EF4-FFF2-40B4-BE49-F238E27FC236}">
-                <a16:creationId xmlns:a16="http://schemas.microsoft.com/office/drawing/2014/main" id="{A2066351-C569-4C4C-A096-308777FCDC32}"/>
-              </a:ext>
-            </a:extLst>
-          </p:cNvPr>
-          <p:cNvPicPr>
-            <a:picLocks noChangeAspect="1"/>
-          </p:cNvPicPr>
-          <p:nvPr/>
-        </p:nvPicPr>
-        <p:blipFill>
-          <a:blip r:embed="rId2">
-            <a:extLst>
-              <a:ext uri="{28A0092B-C50C-407E-A947-70E740481C1C}">
-                <a14:useLocalDpi xmlns:a14="http://schemas.microsoft.com/office/drawing/2010/main" val="0"/>
-              </a:ext>
-            </a:extLst>
-          </a:blip>
-          <a:srcRect t="20219" b="14729"/>
-          <a:stretch>
-            <a:fillRect/>
-          </a:stretch>
-        </p:blipFill>
-        <p:spPr>
-          <a:xfrm>
-            <a:off x="0" y="5620871"/>
-            <a:ext cx="1323975" cy="1218816"/>
-          </a:xfrm>
-          <a:prstGeom prst="rect">
-            <a:avLst/>
-          </a:prstGeom>
-        </p:spPr>
-      </p:pic>
-      <p:sp>
-        <p:nvSpPr>
-          <p:cNvPr id="14" name="Title 9">
-            <a:extLst>
-              <a:ext uri="{FF2B5EF4-FFF2-40B4-BE49-F238E27FC236}">
-                <a16:creationId xmlns:a16="http://schemas.microsoft.com/office/drawing/2014/main" id="{B5087B80-3EE4-1881-0130-ED58CA625092}"/>
-              </a:ext>
-            </a:extLst>
-          </p:cNvPr>
-          <p:cNvSpPr txBox="1">
-            <a:spLocks/>
-          </p:cNvSpPr>
-          <p:nvPr/>
-        </p:nvSpPr>
-        <p:spPr>
-          <a:xfrm>
-            <a:off x="284452" y="2475786"/>
-            <a:ext cx="6382893" cy="953213"/>
-          </a:xfrm>
-          <a:prstGeom prst="rect">
-            <a:avLst/>
-          </a:prstGeom>
-        </p:spPr>
-        <p:txBody>
-          <a:bodyPr anchor="t">
-            <a:noAutofit/>
-          </a:bodyPr>
-          <a:lstStyle>
-            <a:lvl1pPr algn="l" defTabSz="914400" rtl="0" eaLnBrk="1" latinLnBrk="0" hangingPunct="1">
-              <a:lnSpc>
-                <a:spcPct val="90000"/>
-              </a:lnSpc>
-              <a:spcBef>
-                <a:spcPct val="0"/>
-              </a:spcBef>
-              <a:buNone/>
-              <a:defRPr sz="4000" kern="1200">
-                <a:solidFill>
-                  <a:schemeClr val="bg1"/>
-                </a:solidFill>
-                <a:latin typeface="Arial" panose="020B0604020202020204" pitchFamily="34" charset="0"/>
-                <a:ea typeface="+mj-ea"/>
-                <a:cs typeface="Arial" panose="020B0604020202020204" pitchFamily="34" charset="0"/>
-              </a:defRPr>
-            </a:lvl1pPr>
-          </a:lstStyle>
-          <a:p>
-            <a:pPr marL="0" marR="0" lvl="0" indent="0" rtl="0">
-              <a:spcBef>
-                <a:spcPts val="600"/>
-              </a:spcBef>
-              <a:spcAft>
-                <a:spcPts val="0"/>
-              </a:spcAft>
-              <a:buNone/>
-            </a:pPr>
-            <a:r>
-              <a:rPr sz="1300" b="1" i="0">
-                <a:solidFill>
-                  <a:srgbClr val="006E96"/>
-                </a:solidFill>
-                <a:latin typeface="Arial"/>
-              </a:rPr>
-              <a:t>KP1 · Government Enterprise Architecture · Module 2 · Video 2.2</a:t>
-            </a:r>
-          </a:p>
-          <a:p>
-            <a:r>
-              <a:rPr sz="1200" b="0" i="1">
-                <a:solidFill>
-                  <a:srgbClr val="595959"/>
-                </a:solidFill>
-                <a:latin typeface="Arial"/>
-              </a:rPr>
-              <a:t>The metamodel is the small set of entities — Capability, Service, Application, Data Domain, Technology Component — and the relationships between them that PAERA already defines. Adopt it, and two ministries' architectures can be compared, connected and re-used. Skip it, and every team draws a different picture that no one else can read.</a:t>
-            </a:r>
-          </a:p>
-        </p:txBody>
-      </p:sp>
-      <p:sp>
-        <p:nvSpPr>
-          <p:cNvPr id="17" name="Title 9">
-            <a:extLst>
-              <a:ext uri="{FF2B5EF4-FFF2-40B4-BE49-F238E27FC236}">
-                <a16:creationId xmlns:a16="http://schemas.microsoft.com/office/drawing/2014/main" id="{5E8796F7-DD26-D250-5E97-B38B22298E72}"/>
-              </a:ext>
-            </a:extLst>
-          </p:cNvPr>
-          <p:cNvSpPr txBox="1">
-            <a:spLocks/>
-          </p:cNvSpPr>
-          <p:nvPr/>
-        </p:nvSpPr>
-        <p:spPr>
-          <a:xfrm>
-            <a:off x="284452" y="4363897"/>
-            <a:ext cx="6382893" cy="953213"/>
-          </a:xfrm>
-          <a:prstGeom prst="rect">
-            <a:avLst/>
-          </a:prstGeom>
-        </p:spPr>
-        <p:txBody>
-          <a:bodyPr anchor="t">
-            <a:noAutofit/>
-          </a:bodyPr>
-          <a:lstStyle>
-            <a:lvl1pPr algn="l" defTabSz="914400" rtl="0" eaLnBrk="1" latinLnBrk="0" hangingPunct="1">
-              <a:lnSpc>
-                <a:spcPct val="90000"/>
-              </a:lnSpc>
-              <a:spcBef>
-                <a:spcPct val="0"/>
-              </a:spcBef>
-              <a:buNone/>
-              <a:defRPr sz="4000" kern="1200">
-                <a:solidFill>
-                  <a:schemeClr val="bg1"/>
-                </a:solidFill>
-                <a:latin typeface="Arial" panose="020B0604020202020204" pitchFamily="34" charset="0"/>
-                <a:ea typeface="+mj-ea"/>
-                <a:cs typeface="Arial" panose="020B0604020202020204" pitchFamily="34" charset="0"/>
-              </a:defRPr>
-            </a:lvl1pPr>
-          </a:lstStyle>
-          <a:p>
-            <a:pPr marL="0" marR="0" lvl="0" indent="0" rtl="0">
-              <a:spcBef>
-                <a:spcPts val="600"/>
-              </a:spcBef>
-              <a:spcAft>
-                <a:spcPts val="1200"/>
-              </a:spcAft>
-              <a:buNone/>
-            </a:pPr>
-            <a:r>
-              <a:rPr sz="1400" b="1" i="0">
-                <a:solidFill>
-                  <a:srgbClr val="1A1A1A"/>
-                </a:solidFill>
-                <a:latin typeface="Arial"/>
-              </a:rPr>
-              <a:t>Target audience: </a:t>
-            </a:r>
-            <a:r>
-              <a:rPr sz="1400" b="0" i="0">
-                <a:solidFill>
-                  <a:srgbClr val="1A1A1A"/>
-                </a:solidFill>
-                <a:latin typeface="Arial"/>
-              </a:rPr>
-              <a:t>Chief architect · senior architect · sector ICT lead</a:t>
-            </a:r>
-          </a:p>
-        </p:txBody>
-      </p:sp>
-      <p:sp>
-        <p:nvSpPr>
-          <p:cNvPr id="18" name="Rectangle 17"/>
-          <p:cNvSpPr/>
-          <p:nvPr/>
-        </p:nvSpPr>
-        <p:spPr>
-          <a:xfrm>
-            <a:off x="7022592" y="0"/>
-            <a:ext cx="5169103" cy="6858000"/>
-          </a:xfrm>
-          <a:prstGeom prst="rect">
-            <a:avLst/>
-          </a:prstGeom>
-          <a:solidFill>
-            <a:srgbClr val="009CD6"/>
-          </a:solidFill>
-          <a:ln>
-            <a:noFill/>
-          </a:ln>
-          <a:effectLst/>
-        </p:spPr>
-        <p:style>
-          <a:lnRef idx="1">
-            <a:schemeClr val="accent1"/>
-          </a:lnRef>
-          <a:fillRef idx="3">
-            <a:schemeClr val="accent1"/>
-          </a:fillRef>
-          <a:effectRef idx="2">
-            <a:schemeClr val="accent1"/>
-          </a:effectRef>
-          <a:fontRef idx="minor">
-            <a:schemeClr val="lt1"/>
-          </a:fontRef>
-        </p:style>
-        <p:txBody>
-          <a:bodyPr rtlCol="0" anchor="ctr"/>
-          <a:lstStyle/>
-          <a:p>
-            <a:pPr algn="ctr"/>
-          </a:p>
-        </p:txBody>
-      </p:sp>
-      <p:sp>
-        <p:nvSpPr>
-          <p:cNvPr id="19" name="TextBox 18"/>
-          <p:cNvSpPr txBox="1"/>
-          <p:nvPr/>
-        </p:nvSpPr>
-        <p:spPr>
-          <a:xfrm>
-            <a:off x="7452360" y="457200"/>
-            <a:ext cx="4297680" cy="457200"/>
-          </a:xfrm>
-          <a:prstGeom prst="rect">
-            <a:avLst/>
-          </a:prstGeom>
-          <a:noFill/>
-        </p:spPr>
-        <p:txBody>
-          <a:bodyPr wrap="square">
-            <a:spAutoFit/>
-          </a:bodyPr>
-          <a:lstStyle/>
-          <a:p>
-            <a:r>
-              <a:rPr sz="1100" b="1" i="0">
-                <a:solidFill>
-                  <a:srgbClr val="E5F5FB"/>
-                </a:solidFill>
-                <a:latin typeface="Arial"/>
-              </a:rPr>
-              <a:t>THE FOUR LAYERS THIS MODULE TEACHES</a:t>
-            </a:r>
-          </a:p>
-        </p:txBody>
-      </p:sp>
-      <p:sp>
-        <p:nvSpPr>
-          <p:cNvPr id="20" name="Rounded Rectangle 19"/>
-          <p:cNvSpPr/>
-          <p:nvPr/>
-        </p:nvSpPr>
-        <p:spPr>
-          <a:xfrm>
-            <a:off x="7452360" y="960120"/>
-            <a:ext cx="3840480" cy="658368"/>
-          </a:xfrm>
-          <a:prstGeom prst="roundRect">
-            <a:avLst>
-              <a:gd name="adj" fmla="val 14000"/>
-            </a:avLst>
-          </a:prstGeom>
-          <a:solidFill>
-            <a:srgbClr val="FFFFFF"/>
-          </a:solidFill>
-          <a:ln>
-            <a:noFill/>
-          </a:ln>
-          <a:effectLst/>
-        </p:spPr>
-        <p:style>
-          <a:lnRef idx="1">
-            <a:schemeClr val="accent1"/>
-          </a:lnRef>
-          <a:fillRef idx="3">
-            <a:schemeClr val="accent1"/>
-          </a:fillRef>
-          <a:effectRef idx="2">
-            <a:schemeClr val="accent1"/>
-          </a:effectRef>
-          <a:fontRef idx="minor">
-            <a:schemeClr val="lt1"/>
-          </a:fontRef>
-        </p:style>
-        <p:txBody>
-          <a:bodyPr rtlCol="0" anchor="ctr" lIns="164592" wrap="square"/>
-          <a:lstStyle/>
-          <a:p>
-            <a:pPr algn="ctr"/>
-            <a:r>
-              <a:rPr sz="1500" b="1" i="0">
-                <a:solidFill>
-                  <a:srgbClr val="1A1A1A"/>
-                </a:solidFill>
-                <a:latin typeface="Arial"/>
-              </a:rPr>
-              <a:t>Business — what the body does</a:t>
-            </a:r>
-          </a:p>
-        </p:txBody>
-      </p:sp>
-      <p:sp>
-        <p:nvSpPr>
-          <p:cNvPr id="21" name="Rounded Rectangle 20"/>
-          <p:cNvSpPr/>
-          <p:nvPr/>
-        </p:nvSpPr>
-        <p:spPr>
-          <a:xfrm>
-            <a:off x="7452360" y="1892808"/>
-            <a:ext cx="3840480" cy="658368"/>
-          </a:xfrm>
-          <a:prstGeom prst="roundRect">
-            <a:avLst>
-              <a:gd name="adj" fmla="val 14000"/>
-            </a:avLst>
-          </a:prstGeom>
-          <a:solidFill>
-            <a:srgbClr val="FFFFFF"/>
-          </a:solidFill>
-          <a:ln>
-            <a:noFill/>
-          </a:ln>
-          <a:effectLst/>
-        </p:spPr>
-        <p:style>
-          <a:lnRef idx="1">
-            <a:schemeClr val="accent1"/>
-          </a:lnRef>
-          <a:fillRef idx="3">
-            <a:schemeClr val="accent1"/>
-          </a:fillRef>
-          <a:effectRef idx="2">
-            <a:schemeClr val="accent1"/>
-          </a:effectRef>
-          <a:fontRef idx="minor">
-            <a:schemeClr val="lt1"/>
-          </a:fontRef>
-        </p:style>
-        <p:txBody>
-          <a:bodyPr rtlCol="0" anchor="ctr" lIns="164592" wrap="square"/>
-          <a:lstStyle/>
-          <a:p>
-            <a:pPr algn="ctr"/>
-            <a:r>
-              <a:rPr sz="1500" b="1" i="0">
-                <a:solidFill>
-                  <a:srgbClr val="1A1A1A"/>
-                </a:solidFill>
-                <a:latin typeface="Arial"/>
-              </a:rPr>
-              <a:t>Data — what it holds, who owns it</a:t>
-            </a:r>
-          </a:p>
-        </p:txBody>
-      </p:sp>
-      <p:sp>
-        <p:nvSpPr>
-          <p:cNvPr id="22" name="Rounded Rectangle 21"/>
-          <p:cNvSpPr/>
-          <p:nvPr/>
-        </p:nvSpPr>
-        <p:spPr>
-          <a:xfrm>
-            <a:off x="7452360" y="2825496"/>
-            <a:ext cx="3840480" cy="658368"/>
-          </a:xfrm>
-          <a:prstGeom prst="roundRect">
-            <a:avLst>
-              <a:gd name="adj" fmla="val 14000"/>
-            </a:avLst>
-          </a:prstGeom>
-          <a:solidFill>
-            <a:srgbClr val="FFFFFF"/>
-          </a:solidFill>
-          <a:ln>
-            <a:noFill/>
-          </a:ln>
-          <a:effectLst/>
-        </p:spPr>
-        <p:style>
-          <a:lnRef idx="1">
-            <a:schemeClr val="accent1"/>
-          </a:lnRef>
-          <a:fillRef idx="3">
-            <a:schemeClr val="accent1"/>
-          </a:fillRef>
-          <a:effectRef idx="2">
-            <a:schemeClr val="accent1"/>
-          </a:effectRef>
-          <a:fontRef idx="minor">
-            <a:schemeClr val="lt1"/>
-          </a:fontRef>
-        </p:style>
-        <p:txBody>
-          <a:bodyPr rtlCol="0" anchor="ctr" lIns="164592" wrap="square"/>
-          <a:lstStyle/>
-          <a:p>
-            <a:pPr algn="ctr"/>
-            <a:r>
-              <a:rPr sz="1500" b="1" i="0">
-                <a:solidFill>
-                  <a:srgbClr val="1A1A1A"/>
-                </a:solidFill>
-                <a:latin typeface="Arial"/>
-              </a:rPr>
-              <a:t>Application — what supports the work</a:t>
-            </a:r>
-          </a:p>
-        </p:txBody>
-      </p:sp>
-      <p:sp>
-        <p:nvSpPr>
-          <p:cNvPr id="23" name="Rounded Rectangle 22"/>
-          <p:cNvSpPr/>
-          <p:nvPr/>
-        </p:nvSpPr>
-        <p:spPr>
-          <a:xfrm>
-            <a:off x="7452360" y="3758184"/>
-            <a:ext cx="3840480" cy="658368"/>
-          </a:xfrm>
-          <a:prstGeom prst="roundRect">
-            <a:avLst>
-              <a:gd name="adj" fmla="val 14000"/>
-            </a:avLst>
-          </a:prstGeom>
-          <a:solidFill>
-            <a:srgbClr val="006E96"/>
-          </a:solidFill>
-          <a:ln>
-            <a:noFill/>
-          </a:ln>
-          <a:effectLst/>
-        </p:spPr>
-        <p:style>
-          <a:lnRef idx="1">
-            <a:schemeClr val="accent1"/>
-          </a:lnRef>
-          <a:fillRef idx="3">
-            <a:schemeClr val="accent1"/>
-          </a:fillRef>
-          <a:effectRef idx="2">
-            <a:schemeClr val="accent1"/>
-          </a:effectRef>
-          <a:fontRef idx="minor">
-            <a:schemeClr val="lt1"/>
-          </a:fontRef>
-        </p:style>
-        <p:txBody>
-          <a:bodyPr rtlCol="0" anchor="ctr" lIns="164592" wrap="square"/>
-          <a:lstStyle/>
-          <a:p>
-            <a:pPr algn="ctr"/>
-            <a:r>
-              <a:rPr sz="1500" b="1" i="0">
-                <a:solidFill>
-                  <a:srgbClr val="FFFFFF"/>
-                </a:solidFill>
-                <a:latin typeface="Arial"/>
-              </a:rPr>
-              <a:t>Technology — what it all runs on</a:t>
-            </a:r>
-          </a:p>
-        </p:txBody>
-      </p:sp>
-      <p:sp>
-        <p:nvSpPr>
-          <p:cNvPr id="24" name="TextBox 23"/>
-          <p:cNvSpPr txBox="1"/>
-          <p:nvPr/>
-        </p:nvSpPr>
-        <p:spPr>
-          <a:xfrm>
-            <a:off x="7452360" y="5806440"/>
-            <a:ext cx="4297680" cy="731520"/>
-          </a:xfrm>
-          <a:prstGeom prst="rect">
-            <a:avLst/>
-          </a:prstGeom>
-          <a:noFill/>
-        </p:spPr>
-        <p:txBody>
-          <a:bodyPr wrap="square">
-            <a:spAutoFit/>
-          </a:bodyPr>
-          <a:lstStyle/>
-          <a:p>
-            <a:r>
-              <a:rPr sz="1200" b="0" i="0">
-                <a:solidFill>
-                  <a:srgbClr val="FFFFFF"/>
-                </a:solidFill>
-                <a:latin typeface="Arial"/>
-              </a:rPr>
-              <a:t>6 shared entities · 10 principles to adopt · 2 traps to catch at Assess</a:t>
-            </a:r>
-          </a:p>
-        </p:txBody>
-      </p:sp>
-    </p:spTree>
-    <p:extLst>
-      <p:ext uri="{BB962C8B-B14F-4D97-AF65-F5344CB8AC3E}">
-        <p14:creationId xmlns:p14="http://schemas.microsoft.com/office/powerpoint/2010/main" val="1196800265"/>
-      </p:ext>
-    </p:extLst>
-  </p:cSld>
-  <p:clrMapOvr>
-    <a:masterClrMapping/>
-  </p:clrMapOvr>
-</p:sld>
-</file>
-
-<file path=ppt/slides/slide10.xml><?xml version="1.0" encoding="utf-8"?>
-<p:sld xmlns:a="http://schemas.openxmlformats.org/drawingml/2006/main" xmlns:p="http://schemas.openxmlformats.org/presentationml/2006/main" xmlns:r="http://schemas.openxmlformats.org/officeDocument/2006/relationships">
-  <p:cSld>
-    <p:spTree>
-      <p:nvGrpSpPr>
-        <p:cNvPr id="1" name=""/>
-        <p:cNvGrpSpPr/>
-        <p:nvPr/>
-      </p:nvGrpSpPr>
-      <p:grpSpPr/>
-      <p:sp>
-        <p:nvSpPr>
-          <p:cNvPr id="2" name="TextBox 1"/>
-          <p:cNvSpPr txBox="1"/>
-          <p:nvPr/>
-        </p:nvSpPr>
-        <p:spPr>
-          <a:xfrm>
-            <a:off x="822960" y="822960"/>
-            <a:ext cx="7315200" cy="457200"/>
-          </a:xfrm>
-          <a:prstGeom prst="rect">
-            <a:avLst/>
-          </a:prstGeom>
-          <a:noFill/>
-        </p:spPr>
-        <p:txBody>
-          <a:bodyPr wrap="square">
-            <a:spAutoFit/>
-          </a:bodyPr>
-          <a:lstStyle/>
-          <a:p>
-            <a:r>
-              <a:rPr sz="1200" b="1" i="0">
-                <a:solidFill>
-                  <a:srgbClr val="595959"/>
-                </a:solidFill>
-                <a:latin typeface="Arial"/>
-              </a:rPr>
-              <a:t>KP1 · MODULE 2 · VIDEO 2.2</a:t>
-            </a:r>
-          </a:p>
-        </p:txBody>
-      </p:sp>
-      <p:sp>
-        <p:nvSpPr>
-          <p:cNvPr id="3" name="TextBox 2"/>
-          <p:cNvSpPr txBox="1"/>
-          <p:nvPr/>
-        </p:nvSpPr>
-        <p:spPr>
-          <a:xfrm>
-            <a:off x="822960" y="1828800"/>
-            <a:ext cx="2011680" cy="1097280"/>
-          </a:xfrm>
-          <a:prstGeom prst="rect">
-            <a:avLst/>
-          </a:prstGeom>
-          <a:noFill/>
-        </p:spPr>
-        <p:txBody>
-          <a:bodyPr wrap="square">
-            <a:spAutoFit/>
-          </a:bodyPr>
-          <a:lstStyle/>
-          <a:p>
-            <a:r>
-              <a:rPr sz="6000" b="1" i="0">
-                <a:solidFill>
-                  <a:srgbClr val="009CD6"/>
-                </a:solidFill>
-                <a:latin typeface="Arial"/>
-              </a:rPr>
-              <a:t>2.2</a:t>
-            </a:r>
-          </a:p>
-        </p:txBody>
-      </p:sp>
-      <p:sp>
-        <p:nvSpPr>
-          <p:cNvPr id="4" name="TextBox 3"/>
-          <p:cNvSpPr txBox="1"/>
-          <p:nvPr/>
-        </p:nvSpPr>
-        <p:spPr>
-          <a:xfrm>
-            <a:off x="822960" y="2880360"/>
-            <a:ext cx="9601200" cy="1371600"/>
-          </a:xfrm>
-          <a:prstGeom prst="rect">
-            <a:avLst/>
-          </a:prstGeom>
-          <a:noFill/>
-        </p:spPr>
-        <p:txBody>
-          <a:bodyPr wrap="square">
-            <a:spAutoFit/>
-          </a:bodyPr>
-          <a:lstStyle/>
-          <a:p>
-            <a:r>
-              <a:rPr sz="3400" b="1" i="0">
-                <a:solidFill>
-                  <a:srgbClr val="1A1A1A"/>
-                </a:solidFill>
-                <a:latin typeface="Arial"/>
-              </a:rPr>
-              <a:t>The shared vocabulary that makes re-use possible</a:t>
-            </a:r>
-          </a:p>
-        </p:txBody>
-      </p:sp>
-      <p:sp>
-        <p:nvSpPr>
-          <p:cNvPr id="5" name="TextBox 4"/>
-          <p:cNvSpPr txBox="1"/>
-          <p:nvPr/>
-        </p:nvSpPr>
-        <p:spPr>
-          <a:xfrm>
-            <a:off x="822960" y="4343400"/>
-            <a:ext cx="9875520" cy="1554480"/>
-          </a:xfrm>
-          <a:prstGeom prst="rect">
-            <a:avLst/>
-          </a:prstGeom>
-          <a:noFill/>
-        </p:spPr>
-        <p:txBody>
-          <a:bodyPr wrap="square">
-            <a:spAutoFit/>
-          </a:bodyPr>
-          <a:lstStyle/>
-          <a:p>
-            <a:r>
-              <a:rPr sz="1700" b="0" i="1">
-                <a:solidFill>
-                  <a:srgbClr val="595959"/>
-                </a:solidFill>
-                <a:latin typeface="Arial"/>
-              </a:rPr>
-              <a:t>The metamodel is the small set of entities — Capability, Service, Application, Data Domain, Technology Component — and the relationships between them that PAERA already defines. Adopt it, and two ministries' architectures can be compared, connected and re-used. Skip it, and every team draws a different picture that no one else can read.</a:t>
-            </a:r>
-          </a:p>
-        </p:txBody>
-      </p:sp>
-      <p:sp>
-        <p:nvSpPr>
-          <p:cNvPr id="6" name="TextBox 5"/>
-          <p:cNvSpPr txBox="1"/>
-          <p:nvPr/>
-        </p:nvSpPr>
-        <p:spPr>
-          <a:xfrm>
-            <a:off x="822960" y="5989320"/>
-            <a:ext cx="7315200" cy="365760"/>
-          </a:xfrm>
-          <a:prstGeom prst="rect">
-            <a:avLst/>
-          </a:prstGeom>
-          <a:noFill/>
-        </p:spPr>
-        <p:txBody>
-          <a:bodyPr wrap="square">
-            <a:spAutoFit/>
-          </a:bodyPr>
-          <a:lstStyle/>
-          <a:p>
-            <a:r>
-              <a:rPr sz="1200" b="0" i="0">
-                <a:solidFill>
-                  <a:srgbClr val="595959"/>
-                </a:solidFill>
-                <a:latin typeface="Arial"/>
-              </a:rPr>
-              <a:t>~5 minutes · standalone video · voice-over on text slides</a:t>
-            </a:r>
-          </a:p>
-        </p:txBody>
-      </p:sp>
-    </p:spTree>
-  </p:cSld>
-  <p:clrMapOvr>
-    <a:masterClrMapping/>
-  </p:clrMapOvr>
-</p:sld>
-</file>
-
 <file path=ppt/slides/slide11.xml><?xml version="1.0" encoding="utf-8"?>
 <p:sld xmlns:a="http://schemas.openxmlformats.org/drawingml/2006/main" xmlns:p="http://schemas.openxmlformats.org/presentationml/2006/main" xmlns:r="http://schemas.openxmlformats.org/officeDocument/2006/relationships">
   <p:cSld>
@@ -12542,58 +11697,14 @@
       <p:grpSpPr/>
       <p:sp>
         <p:nvSpPr>
-          <p:cNvPr id="2" name="Rectangle 1"/>
-          <p:cNvSpPr/>
-          <p:nvPr/>
-        </p:nvSpPr>
-        <p:spPr>
-          <a:xfrm>
-            <a:off x="457200" y="384048"/>
-            <a:ext cx="45720" cy="256032"/>
-          </a:xfrm>
-          <a:prstGeom prst="rect">
-            <a:avLst/>
-          </a:prstGeom>
-          <a:solidFill>
-            <a:srgbClr val="009CD6"/>
-          </a:solidFill>
-          <a:ln>
-            <a:noFill/>
-          </a:ln>
-          <a:effectLst/>
-        </p:spPr>
-        <p:style>
-          <a:lnRef idx="1">
-            <a:schemeClr val="accent1"/>
-          </a:lnRef>
-          <a:fillRef idx="3">
-            <a:schemeClr val="accent1"/>
-          </a:fillRef>
-          <a:effectRef idx="2">
-            <a:schemeClr val="accent1"/>
-          </a:effectRef>
-          <a:fontRef idx="minor">
-            <a:schemeClr val="lt1"/>
-          </a:fontRef>
-        </p:style>
-        <p:txBody>
-          <a:bodyPr rtlCol="0" anchor="ctr"/>
-          <a:lstStyle/>
-          <a:p>
-            <a:pPr algn="ctr"/>
-          </a:p>
-        </p:txBody>
-      </p:sp>
-      <p:sp>
-        <p:nvSpPr>
-          <p:cNvPr id="3" name="TextBox 2"/>
+          <p:cNvPr id="2" name="TextBox 1"/>
           <p:cNvSpPr txBox="1"/>
           <p:nvPr/>
         </p:nvSpPr>
         <p:spPr>
           <a:xfrm>
-            <a:off x="621792" y="274320"/>
-            <a:ext cx="11247120" cy="914400"/>
+            <a:off x="822960" y="822960"/>
+            <a:ext cx="7315200" cy="457200"/>
           </a:xfrm>
           <a:prstGeom prst="rect">
             <a:avLst/>
@@ -12607,27 +11718,95 @@
           <a:lstStyle/>
           <a:p>
             <a:r>
-              <a:rPr sz="2800" b="1" i="0">
+              <a:rPr sz="1200" b="1" i="0">
+                <a:solidFill>
+                  <a:srgbClr val="595959"/>
+                </a:solidFill>
+                <a:latin typeface="Arial"/>
+              </a:rPr>
+              <a:t>KP1 · MODULE 2 · VIDEO 2.2</a:t>
+            </a:r>
+          </a:p>
+        </p:txBody>
+      </p:sp>
+      <p:sp>
+        <p:nvSpPr>
+          <p:cNvPr id="3" name="TextBox 2"/>
+          <p:cNvSpPr txBox="1"/>
+          <p:nvPr/>
+        </p:nvSpPr>
+        <p:spPr>
+          <a:xfrm>
+            <a:off x="822960" y="1828800"/>
+            <a:ext cx="2011680" cy="1097280"/>
+          </a:xfrm>
+          <a:prstGeom prst="rect">
+            <a:avLst/>
+          </a:prstGeom>
+          <a:noFill/>
+        </p:spPr>
+        <p:txBody>
+          <a:bodyPr wrap="square">
+            <a:spAutoFit/>
+          </a:bodyPr>
+          <a:lstStyle/>
+          <a:p>
+            <a:r>
+              <a:rPr sz="6000" b="1" i="0">
+                <a:solidFill>
+                  <a:srgbClr val="009CD6"/>
+                </a:solidFill>
+                <a:latin typeface="Arial"/>
+              </a:rPr>
+              <a:t>2.2</a:t>
+            </a:r>
+          </a:p>
+        </p:txBody>
+      </p:sp>
+      <p:sp>
+        <p:nvSpPr>
+          <p:cNvPr id="4" name="TextBox 3"/>
+          <p:cNvSpPr txBox="1"/>
+          <p:nvPr/>
+        </p:nvSpPr>
+        <p:spPr>
+          <a:xfrm>
+            <a:off x="822960" y="2880360"/>
+            <a:ext cx="9601200" cy="1371600"/>
+          </a:xfrm>
+          <a:prstGeom prst="rect">
+            <a:avLst/>
+          </a:prstGeom>
+          <a:noFill/>
+        </p:spPr>
+        <p:txBody>
+          <a:bodyPr wrap="square">
+            <a:spAutoFit/>
+          </a:bodyPr>
+          <a:lstStyle/>
+          <a:p>
+            <a:r>
+              <a:rPr sz="3400" b="1" i="0">
                 <a:solidFill>
                   <a:srgbClr val="1A1A1A"/>
                 </a:solidFill>
                 <a:latin typeface="Arial"/>
               </a:rPr>
-              <a:t>A metamodel is a small shared dictionary</a:t>
-            </a:r>
-          </a:p>
-        </p:txBody>
-      </p:sp>
-      <p:sp>
-        <p:nvSpPr>
-          <p:cNvPr id="4" name="TextBox 3"/>
+              <a:t>The shared vocabulary that makes re-use possible</a:t>
+            </a:r>
+          </a:p>
+        </p:txBody>
+      </p:sp>
+      <p:sp>
+        <p:nvSpPr>
+          <p:cNvPr id="5" name="TextBox 4"/>
           <p:cNvSpPr txBox="1"/>
           <p:nvPr/>
         </p:nvSpPr>
         <p:spPr>
           <a:xfrm>
-            <a:off x="658368" y="1417320"/>
-            <a:ext cx="10984687" cy="761999"/>
+            <a:off x="822960" y="4343400"/>
+            <a:ext cx="9875520" cy="1554480"/>
           </a:xfrm>
           <a:prstGeom prst="rect">
             <a:avLst/>
@@ -12640,80 +11819,15 @@
           </a:bodyPr>
           <a:lstStyle/>
           <a:p>
-            <a:pPr>
-              <a:spcAft>
-                <a:spcPts val="300"/>
-              </a:spcAft>
-            </a:pPr>
-            <a:r>
-              <a:rPr sz="1800" b="1" i="0">
-                <a:solidFill>
-                  <a:srgbClr val="1A1A1A"/>
-                </a:solidFill>
-                <a:latin typeface="Arial"/>
-              </a:rPr>
-              <a:t>Capability</a:t>
-            </a:r>
-          </a:p>
-          <a:p>
-            <a:pPr>
-              <a:spcAft>
-                <a:spcPts val="300"/>
-              </a:spcAft>
-            </a:pPr>
-            <a:r>
-              <a:rPr sz="1500" b="0" i="0">
+            <a:r>
+              <a:rPr sz="1700" b="0" i="1">
                 <a:solidFill>
                   <a:srgbClr val="595959"/>
                 </a:solidFill>
                 <a:latin typeface="Arial"/>
               </a:rPr>
-              <a:t>Something a public body can do — register a learner, run an examination.</a:t>
-            </a:r>
-          </a:p>
-        </p:txBody>
-      </p:sp>
-      <p:sp>
-        <p:nvSpPr>
-          <p:cNvPr id="5" name="Rectangle 4"/>
-          <p:cNvSpPr/>
-          <p:nvPr/>
-        </p:nvSpPr>
-        <p:spPr>
-          <a:xfrm>
-            <a:off x="621792" y="2183892"/>
-            <a:ext cx="10881360" cy="12700"/>
-          </a:xfrm>
-          <a:prstGeom prst="rect">
-            <a:avLst/>
-          </a:prstGeom>
-          <a:solidFill>
-            <a:srgbClr val="DDECF4"/>
-          </a:solidFill>
-          <a:ln>
-            <a:noFill/>
-          </a:ln>
-          <a:effectLst/>
-        </p:spPr>
-        <p:style>
-          <a:lnRef idx="1">
-            <a:schemeClr val="accent1"/>
-          </a:lnRef>
-          <a:fillRef idx="3">
-            <a:schemeClr val="accent1"/>
-          </a:fillRef>
-          <a:effectRef idx="2">
-            <a:schemeClr val="accent1"/>
-          </a:effectRef>
-          <a:fontRef idx="minor">
-            <a:schemeClr val="lt1"/>
-          </a:fontRef>
-        </p:style>
-        <p:txBody>
-          <a:bodyPr rtlCol="0" anchor="ctr"/>
-          <a:lstStyle/>
-          <a:p>
-            <a:pPr algn="ctr"/>
+              <a:t>The metamodel is the small set of entities — Capability, Service, Application, Data Domain, Technology Component — and the relationships between them that PAERA already defines. Adopt it, and two ministries' architectures can be compared, connected and re-used. Skip it, and every team draws a different picture that no one else can read.</a:t>
+            </a:r>
           </a:p>
         </p:txBody>
       </p:sp>
@@ -12725,8 +11839,8 @@
         </p:nvSpPr>
         <p:spPr>
           <a:xfrm>
-            <a:off x="658368" y="2225040"/>
-            <a:ext cx="10984687" cy="761999"/>
+            <a:off x="822960" y="5989320"/>
+            <a:ext cx="7315200" cy="365760"/>
           </a:xfrm>
           <a:prstGeom prst="rect">
             <a:avLst/>
@@ -12739,465 +11853,14 @@
           </a:bodyPr>
           <a:lstStyle/>
           <a:p>
-            <a:pPr>
-              <a:spcAft>
-                <a:spcPts val="300"/>
-              </a:spcAft>
-            </a:pPr>
-            <a:r>
-              <a:rPr sz="1800" b="1" i="0">
-                <a:solidFill>
-                  <a:srgbClr val="1A1A1A"/>
-                </a:solidFill>
-                <a:latin typeface="Arial"/>
-              </a:rPr>
-              <a:t>Service</a:t>
-            </a:r>
-          </a:p>
-          <a:p>
-            <a:pPr>
-              <a:spcAft>
-                <a:spcPts val="300"/>
-              </a:spcAft>
-            </a:pPr>
-            <a:r>
-              <a:rPr sz="1500" b="0" i="0">
+            <a:r>
+              <a:rPr sz="1200" b="0" i="0">
                 <a:solidFill>
                   <a:srgbClr val="595959"/>
                 </a:solidFill>
                 <a:latin typeface="Arial"/>
               </a:rPr>
-              <a:t>How a capability reaches a citizen or another body.</a:t>
-            </a:r>
-          </a:p>
-        </p:txBody>
-      </p:sp>
-      <p:sp>
-        <p:nvSpPr>
-          <p:cNvPr id="7" name="Rectangle 6"/>
-          <p:cNvSpPr/>
-          <p:nvPr/>
-        </p:nvSpPr>
-        <p:spPr>
-          <a:xfrm>
-            <a:off x="621792" y="2991612"/>
-            <a:ext cx="10881360" cy="12700"/>
-          </a:xfrm>
-          <a:prstGeom prst="rect">
-            <a:avLst/>
-          </a:prstGeom>
-          <a:solidFill>
-            <a:srgbClr val="DDECF4"/>
-          </a:solidFill>
-          <a:ln>
-            <a:noFill/>
-          </a:ln>
-          <a:effectLst/>
-        </p:spPr>
-        <p:style>
-          <a:lnRef idx="1">
-            <a:schemeClr val="accent1"/>
-          </a:lnRef>
-          <a:fillRef idx="3">
-            <a:schemeClr val="accent1"/>
-          </a:fillRef>
-          <a:effectRef idx="2">
-            <a:schemeClr val="accent1"/>
-          </a:effectRef>
-          <a:fontRef idx="minor">
-            <a:schemeClr val="lt1"/>
-          </a:fontRef>
-        </p:style>
-        <p:txBody>
-          <a:bodyPr rtlCol="0" anchor="ctr"/>
-          <a:lstStyle/>
-          <a:p>
-            <a:pPr algn="ctr"/>
-          </a:p>
-        </p:txBody>
-      </p:sp>
-      <p:sp>
-        <p:nvSpPr>
-          <p:cNvPr id="8" name="TextBox 7"/>
-          <p:cNvSpPr txBox="1"/>
-          <p:nvPr/>
-        </p:nvSpPr>
-        <p:spPr>
-          <a:xfrm>
-            <a:off x="658368" y="3032760"/>
-            <a:ext cx="10984687" cy="761999"/>
-          </a:xfrm>
-          <a:prstGeom prst="rect">
-            <a:avLst/>
-          </a:prstGeom>
-          <a:noFill/>
-        </p:spPr>
-        <p:txBody>
-          <a:bodyPr wrap="square">
-            <a:spAutoFit/>
-          </a:bodyPr>
-          <a:lstStyle/>
-          <a:p>
-            <a:pPr>
-              <a:spcAft>
-                <a:spcPts val="300"/>
-              </a:spcAft>
-            </a:pPr>
-            <a:r>
-              <a:rPr sz="1800" b="1" i="0">
-                <a:solidFill>
-                  <a:srgbClr val="1A1A1A"/>
-                </a:solidFill>
-                <a:latin typeface="Arial"/>
-              </a:rPr>
-              <a:t>Application</a:t>
-            </a:r>
-          </a:p>
-          <a:p>
-            <a:pPr>
-              <a:spcAft>
-                <a:spcPts val="300"/>
-              </a:spcAft>
-            </a:pPr>
-            <a:r>
-              <a:rPr sz="1500" b="0" i="0">
-                <a:solidFill>
-                  <a:srgbClr val="595959"/>
-                </a:solidFill>
-                <a:latin typeface="Arial"/>
-              </a:rPr>
-              <a:t>The software that supports a capability.</a:t>
-            </a:r>
-          </a:p>
-        </p:txBody>
-      </p:sp>
-      <p:sp>
-        <p:nvSpPr>
-          <p:cNvPr id="9" name="Rectangle 8"/>
-          <p:cNvSpPr/>
-          <p:nvPr/>
-        </p:nvSpPr>
-        <p:spPr>
-          <a:xfrm>
-            <a:off x="621792" y="3799332"/>
-            <a:ext cx="10881360" cy="12700"/>
-          </a:xfrm>
-          <a:prstGeom prst="rect">
-            <a:avLst/>
-          </a:prstGeom>
-          <a:solidFill>
-            <a:srgbClr val="DDECF4"/>
-          </a:solidFill>
-          <a:ln>
-            <a:noFill/>
-          </a:ln>
-          <a:effectLst/>
-        </p:spPr>
-        <p:style>
-          <a:lnRef idx="1">
-            <a:schemeClr val="accent1"/>
-          </a:lnRef>
-          <a:fillRef idx="3">
-            <a:schemeClr val="accent1"/>
-          </a:fillRef>
-          <a:effectRef idx="2">
-            <a:schemeClr val="accent1"/>
-          </a:effectRef>
-          <a:fontRef idx="minor">
-            <a:schemeClr val="lt1"/>
-          </a:fontRef>
-        </p:style>
-        <p:txBody>
-          <a:bodyPr rtlCol="0" anchor="ctr"/>
-          <a:lstStyle/>
-          <a:p>
-            <a:pPr algn="ctr"/>
-          </a:p>
-        </p:txBody>
-      </p:sp>
-      <p:sp>
-        <p:nvSpPr>
-          <p:cNvPr id="10" name="TextBox 9"/>
-          <p:cNvSpPr txBox="1"/>
-          <p:nvPr/>
-        </p:nvSpPr>
-        <p:spPr>
-          <a:xfrm>
-            <a:off x="658368" y="3840480"/>
-            <a:ext cx="10984687" cy="761999"/>
-          </a:xfrm>
-          <a:prstGeom prst="rect">
-            <a:avLst/>
-          </a:prstGeom>
-          <a:noFill/>
-        </p:spPr>
-        <p:txBody>
-          <a:bodyPr wrap="square">
-            <a:spAutoFit/>
-          </a:bodyPr>
-          <a:lstStyle/>
-          <a:p>
-            <a:pPr>
-              <a:spcAft>
-                <a:spcPts val="300"/>
-              </a:spcAft>
-            </a:pPr>
-            <a:r>
-              <a:rPr sz="1800" b="1" i="0">
-                <a:solidFill>
-                  <a:srgbClr val="1A1A1A"/>
-                </a:solidFill>
-                <a:latin typeface="Arial"/>
-              </a:rPr>
-              <a:t>Data Domain</a:t>
-            </a:r>
-          </a:p>
-          <a:p>
-            <a:pPr>
-              <a:spcAft>
-                <a:spcPts val="300"/>
-              </a:spcAft>
-            </a:pPr>
-            <a:r>
-              <a:rPr sz="1500" b="0" i="0">
-                <a:solidFill>
-                  <a:srgbClr val="595959"/>
-                </a:solidFill>
-                <a:latin typeface="Arial"/>
-              </a:rPr>
-              <a:t>A kind of information, with one owner.</a:t>
-            </a:r>
-          </a:p>
-        </p:txBody>
-      </p:sp>
-      <p:sp>
-        <p:nvSpPr>
-          <p:cNvPr id="11" name="Rectangle 10"/>
-          <p:cNvSpPr/>
-          <p:nvPr/>
-        </p:nvSpPr>
-        <p:spPr>
-          <a:xfrm>
-            <a:off x="621792" y="4607052"/>
-            <a:ext cx="10881360" cy="12700"/>
-          </a:xfrm>
-          <a:prstGeom prst="rect">
-            <a:avLst/>
-          </a:prstGeom>
-          <a:solidFill>
-            <a:srgbClr val="DDECF4"/>
-          </a:solidFill>
-          <a:ln>
-            <a:noFill/>
-          </a:ln>
-          <a:effectLst/>
-        </p:spPr>
-        <p:style>
-          <a:lnRef idx="1">
-            <a:schemeClr val="accent1"/>
-          </a:lnRef>
-          <a:fillRef idx="3">
-            <a:schemeClr val="accent1"/>
-          </a:fillRef>
-          <a:effectRef idx="2">
-            <a:schemeClr val="accent1"/>
-          </a:effectRef>
-          <a:fontRef idx="minor">
-            <a:schemeClr val="lt1"/>
-          </a:fontRef>
-        </p:style>
-        <p:txBody>
-          <a:bodyPr rtlCol="0" anchor="ctr"/>
-          <a:lstStyle/>
-          <a:p>
-            <a:pPr algn="ctr"/>
-          </a:p>
-        </p:txBody>
-      </p:sp>
-      <p:sp>
-        <p:nvSpPr>
-          <p:cNvPr id="12" name="TextBox 11"/>
-          <p:cNvSpPr txBox="1"/>
-          <p:nvPr/>
-        </p:nvSpPr>
-        <p:spPr>
-          <a:xfrm>
-            <a:off x="658368" y="4648200"/>
-            <a:ext cx="10984687" cy="761999"/>
-          </a:xfrm>
-          <a:prstGeom prst="rect">
-            <a:avLst/>
-          </a:prstGeom>
-          <a:noFill/>
-        </p:spPr>
-        <p:txBody>
-          <a:bodyPr wrap="square">
-            <a:spAutoFit/>
-          </a:bodyPr>
-          <a:lstStyle/>
-          <a:p>
-            <a:pPr>
-              <a:spcAft>
-                <a:spcPts val="300"/>
-              </a:spcAft>
-            </a:pPr>
-            <a:r>
-              <a:rPr sz="1800" b="1" i="0">
-                <a:solidFill>
-                  <a:srgbClr val="1A1A1A"/>
-                </a:solidFill>
-                <a:latin typeface="Arial"/>
-              </a:rPr>
-              <a:t>Technology Component</a:t>
-            </a:r>
-          </a:p>
-          <a:p>
-            <a:pPr>
-              <a:spcAft>
-                <a:spcPts val="300"/>
-              </a:spcAft>
-            </a:pPr>
-            <a:r>
-              <a:rPr sz="1500" b="0" i="0">
-                <a:solidFill>
-                  <a:srgbClr val="595959"/>
-                </a:solidFill>
-                <a:latin typeface="Arial"/>
-              </a:rPr>
-              <a:t>The infrastructure underneath.</a:t>
-            </a:r>
-          </a:p>
-        </p:txBody>
-      </p:sp>
-      <p:sp>
-        <p:nvSpPr>
-          <p:cNvPr id="13" name="Rectangle 12"/>
-          <p:cNvSpPr/>
-          <p:nvPr/>
-        </p:nvSpPr>
-        <p:spPr>
-          <a:xfrm>
-            <a:off x="621792" y="5414771"/>
-            <a:ext cx="10881360" cy="12700"/>
-          </a:xfrm>
-          <a:prstGeom prst="rect">
-            <a:avLst/>
-          </a:prstGeom>
-          <a:solidFill>
-            <a:srgbClr val="DDECF4"/>
-          </a:solidFill>
-          <a:ln>
-            <a:noFill/>
-          </a:ln>
-          <a:effectLst/>
-        </p:spPr>
-        <p:style>
-          <a:lnRef idx="1">
-            <a:schemeClr val="accent1"/>
-          </a:lnRef>
-          <a:fillRef idx="3">
-            <a:schemeClr val="accent1"/>
-          </a:fillRef>
-          <a:effectRef idx="2">
-            <a:schemeClr val="accent1"/>
-          </a:effectRef>
-          <a:fontRef idx="minor">
-            <a:schemeClr val="lt1"/>
-          </a:fontRef>
-        </p:style>
-        <p:txBody>
-          <a:bodyPr rtlCol="0" anchor="ctr"/>
-          <a:lstStyle/>
-          <a:p>
-            <a:pPr algn="ctr"/>
-          </a:p>
-        </p:txBody>
-      </p:sp>
-      <p:sp>
-        <p:nvSpPr>
-          <p:cNvPr id="14" name="TextBox 13"/>
-          <p:cNvSpPr txBox="1"/>
-          <p:nvPr/>
-        </p:nvSpPr>
-        <p:spPr>
-          <a:xfrm>
-            <a:off x="658368" y="5455919"/>
-            <a:ext cx="10984687" cy="761999"/>
-          </a:xfrm>
-          <a:prstGeom prst="rect">
-            <a:avLst/>
-          </a:prstGeom>
-          <a:noFill/>
-        </p:spPr>
-        <p:txBody>
-          <a:bodyPr wrap="square">
-            <a:spAutoFit/>
-          </a:bodyPr>
-          <a:lstStyle/>
-          <a:p>
-            <a:pPr>
-              <a:spcAft>
-                <a:spcPts val="300"/>
-              </a:spcAft>
-            </a:pPr>
-            <a:r>
-              <a:rPr sz="1800" b="1" i="0">
-                <a:solidFill>
-                  <a:srgbClr val="1A1A1A"/>
-                </a:solidFill>
-                <a:latin typeface="Arial"/>
-              </a:rPr>
-              <a:t>Organisation</a:t>
-            </a:r>
-          </a:p>
-          <a:p>
-            <a:pPr>
-              <a:spcAft>
-                <a:spcPts val="300"/>
-              </a:spcAft>
-            </a:pPr>
-            <a:r>
-              <a:rPr sz="1500" b="0" i="0">
-                <a:solidFill>
-                  <a:srgbClr val="595959"/>
-                </a:solidFill>
-                <a:latin typeface="Arial"/>
-              </a:rPr>
-              <a:t>Owns each of these.</a:t>
-            </a:r>
-          </a:p>
-        </p:txBody>
-      </p:sp>
-      <p:sp>
-        <p:nvSpPr>
-          <p:cNvPr id="15" name="TextBox 14"/>
-          <p:cNvSpPr txBox="1"/>
-          <p:nvPr/>
-        </p:nvSpPr>
-        <p:spPr>
-          <a:xfrm>
-            <a:off x="457200" y="6473952"/>
-            <a:ext cx="7772400" cy="292608"/>
-          </a:xfrm>
-          <a:prstGeom prst="rect">
-            <a:avLst/>
-          </a:prstGeom>
-          <a:noFill/>
-        </p:spPr>
-        <p:txBody>
-          <a:bodyPr wrap="square">
-            <a:spAutoFit/>
-          </a:bodyPr>
-          <a:lstStyle/>
-          <a:p>
-            <a:r>
-              <a:rPr sz="900" b="0" i="0">
-                <a:solidFill>
-                  <a:srgbClr val="595959"/>
-                </a:solidFill>
-                <a:latin typeface="Arial"/>
-              </a:rPr>
-              <a:t>2.2 · The shared vocabulary that makes re-use possible</a:t>
+              <a:t>~5 minutes · standalone video · voice-over on text slides</a:t>
             </a:r>
           </a:p>
         </p:txBody>
@@ -13222,58 +11885,14 @@
       <p:grpSpPr/>
       <p:sp>
         <p:nvSpPr>
-          <p:cNvPr id="2" name="Rectangle 1"/>
-          <p:cNvSpPr/>
-          <p:nvPr/>
-        </p:nvSpPr>
-        <p:spPr>
-          <a:xfrm>
-            <a:off x="457200" y="384048"/>
-            <a:ext cx="45720" cy="256032"/>
-          </a:xfrm>
-          <a:prstGeom prst="rect">
-            <a:avLst/>
-          </a:prstGeom>
-          <a:solidFill>
-            <a:srgbClr val="009CD6"/>
-          </a:solidFill>
-          <a:ln>
-            <a:noFill/>
-          </a:ln>
-          <a:effectLst/>
-        </p:spPr>
-        <p:style>
-          <a:lnRef idx="1">
-            <a:schemeClr val="accent1"/>
-          </a:lnRef>
-          <a:fillRef idx="3">
-            <a:schemeClr val="accent1"/>
-          </a:fillRef>
-          <a:effectRef idx="2">
-            <a:schemeClr val="accent1"/>
-          </a:effectRef>
-          <a:fontRef idx="minor">
-            <a:schemeClr val="lt1"/>
-          </a:fontRef>
-        </p:style>
-        <p:txBody>
-          <a:bodyPr rtlCol="0" anchor="ctr"/>
-          <a:lstStyle/>
-          <a:p>
-            <a:pPr algn="ctr"/>
-          </a:p>
-        </p:txBody>
-      </p:sp>
-      <p:sp>
-        <p:nvSpPr>
-          <p:cNvPr id="3" name="TextBox 2"/>
+          <p:cNvPr id="2" name="TextBox 1"/>
           <p:cNvSpPr txBox="1"/>
           <p:nvPr/>
         </p:nvSpPr>
         <p:spPr>
           <a:xfrm>
-            <a:off x="621792" y="274320"/>
-            <a:ext cx="11247120" cy="914400"/>
+            <a:off x="1005840" y="1325880"/>
+            <a:ext cx="5486400" cy="365760"/>
           </a:xfrm>
           <a:prstGeom prst="rect">
             <a:avLst/>
@@ -13286,545 +11905,6 @@
           </a:bodyPr>
           <a:lstStyle/>
           <a:p>
-            <a:r>
-              <a:rPr sz="2800" b="1" i="0">
-                <a:solidFill>
-                  <a:srgbClr val="1A1A1A"/>
-                </a:solidFill>
-                <a:latin typeface="Arial"/>
-              </a:rPr>
-              <a:t>The relationships matter as much as the entities</a:t>
-            </a:r>
-          </a:p>
-        </p:txBody>
-      </p:sp>
-      <p:sp>
-        <p:nvSpPr>
-          <p:cNvPr id="4" name="Rounded Rectangle 3"/>
-          <p:cNvSpPr/>
-          <p:nvPr/>
-        </p:nvSpPr>
-        <p:spPr>
-          <a:xfrm>
-            <a:off x="658368" y="1600200"/>
-            <a:ext cx="1828800" cy="3840480"/>
-          </a:xfrm>
-          <a:prstGeom prst="roundRect">
-            <a:avLst>
-              <a:gd name="adj" fmla="val 8000"/>
-            </a:avLst>
-          </a:prstGeom>
-          <a:solidFill>
-            <a:srgbClr val="F2F2F2"/>
-          </a:solidFill>
-          <a:ln>
-            <a:noFill/>
-          </a:ln>
-          <a:effectLst/>
-        </p:spPr>
-        <p:style>
-          <a:lnRef idx="1">
-            <a:schemeClr val="accent1"/>
-          </a:lnRef>
-          <a:fillRef idx="3">
-            <a:schemeClr val="accent1"/>
-          </a:fillRef>
-          <a:effectRef idx="2">
-            <a:schemeClr val="accent1"/>
-          </a:effectRef>
-          <a:fontRef idx="minor">
-            <a:schemeClr val="lt1"/>
-          </a:fontRef>
-        </p:style>
-        <p:txBody>
-          <a:bodyPr rtlCol="0" anchor="t" lIns="128016" rIns="128016" tIns="91440" bIns="54864" wrap="square"/>
-          <a:lstStyle/>
-          <a:p>
-            <a:pPr algn="l">
-              <a:spcAft>
-                <a:spcPts val="300"/>
-              </a:spcAft>
-            </a:pPr>
-            <a:r>
-              <a:rPr sz="1500" b="1" i="0">
-                <a:solidFill>
-                  <a:srgbClr val="006E96"/>
-                </a:solidFill>
-                <a:latin typeface="Arial"/>
-              </a:rPr>
-              <a:t>Organisation</a:t>
-            </a:r>
-          </a:p>
-          <a:p>
-            <a:pPr algn="l">
-              <a:spcAft>
-                <a:spcPts val="300"/>
-              </a:spcAft>
-            </a:pPr>
-            <a:r>
-              <a:rPr sz="1250" b="0" i="0">
-                <a:solidFill>
-                  <a:srgbClr val="1A1A1A"/>
-                </a:solidFill>
-                <a:latin typeface="Arial"/>
-              </a:rPr>
-              <a:t>owns each of them</a:t>
-            </a:r>
-          </a:p>
-        </p:txBody>
-      </p:sp>
-      <p:sp>
-        <p:nvSpPr>
-          <p:cNvPr id="5" name="Rounded Rectangle 4"/>
-          <p:cNvSpPr/>
-          <p:nvPr/>
-        </p:nvSpPr>
-        <p:spPr>
-          <a:xfrm>
-            <a:off x="3246120" y="1600200"/>
-            <a:ext cx="2651760" cy="960120"/>
-          </a:xfrm>
-          <a:prstGeom prst="roundRect">
-            <a:avLst>
-              <a:gd name="adj" fmla="val 8000"/>
-            </a:avLst>
-          </a:prstGeom>
-          <a:solidFill>
-            <a:srgbClr val="E5F5FB"/>
-          </a:solidFill>
-          <a:ln>
-            <a:noFill/>
-          </a:ln>
-          <a:effectLst/>
-        </p:spPr>
-        <p:style>
-          <a:lnRef idx="1">
-            <a:schemeClr val="accent1"/>
-          </a:lnRef>
-          <a:fillRef idx="3">
-            <a:schemeClr val="accent1"/>
-          </a:fillRef>
-          <a:effectRef idx="2">
-            <a:schemeClr val="accent1"/>
-          </a:effectRef>
-          <a:fontRef idx="minor">
-            <a:schemeClr val="lt1"/>
-          </a:fontRef>
-        </p:style>
-        <p:txBody>
-          <a:bodyPr rtlCol="0" anchor="t" lIns="128016" rIns="128016" tIns="91440" bIns="54864" wrap="square"/>
-          <a:lstStyle/>
-          <a:p>
-            <a:pPr algn="l">
-              <a:spcAft>
-                <a:spcPts val="300"/>
-              </a:spcAft>
-            </a:pPr>
-            <a:r>
-              <a:rPr sz="1500" b="1" i="0">
-                <a:solidFill>
-                  <a:srgbClr val="006E96"/>
-                </a:solidFill>
-                <a:latin typeface="Arial"/>
-              </a:rPr>
-              <a:t>Capability</a:t>
-            </a:r>
-          </a:p>
-          <a:p>
-            <a:pPr algn="l">
-              <a:spcAft>
-                <a:spcPts val="300"/>
-              </a:spcAft>
-            </a:pPr>
-            <a:r>
-              <a:rPr sz="1250" b="0" i="0">
-                <a:solidFill>
-                  <a:srgbClr val="1A1A1A"/>
-                </a:solidFill>
-                <a:latin typeface="Arial"/>
-              </a:rPr>
-              <a:t>what a body can do</a:t>
-            </a:r>
-          </a:p>
-        </p:txBody>
-      </p:sp>
-      <p:sp>
-        <p:nvSpPr>
-          <p:cNvPr id="6" name="Rounded Rectangle 5"/>
-          <p:cNvSpPr/>
-          <p:nvPr/>
-        </p:nvSpPr>
-        <p:spPr>
-          <a:xfrm>
-            <a:off x="8183879" y="1600200"/>
-            <a:ext cx="2651760" cy="960120"/>
-          </a:xfrm>
-          <a:prstGeom prst="roundRect">
-            <a:avLst>
-              <a:gd name="adj" fmla="val 8000"/>
-            </a:avLst>
-          </a:prstGeom>
-          <a:solidFill>
-            <a:srgbClr val="E5F5FB"/>
-          </a:solidFill>
-          <a:ln>
-            <a:noFill/>
-          </a:ln>
-          <a:effectLst/>
-        </p:spPr>
-        <p:style>
-          <a:lnRef idx="1">
-            <a:schemeClr val="accent1"/>
-          </a:lnRef>
-          <a:fillRef idx="3">
-            <a:schemeClr val="accent1"/>
-          </a:fillRef>
-          <a:effectRef idx="2">
-            <a:schemeClr val="accent1"/>
-          </a:effectRef>
-          <a:fontRef idx="minor">
-            <a:schemeClr val="lt1"/>
-          </a:fontRef>
-        </p:style>
-        <p:txBody>
-          <a:bodyPr rtlCol="0" anchor="t" lIns="128016" rIns="128016" tIns="91440" bIns="54864" wrap="square"/>
-          <a:lstStyle/>
-          <a:p>
-            <a:pPr algn="l">
-              <a:spcAft>
-                <a:spcPts val="300"/>
-              </a:spcAft>
-            </a:pPr>
-            <a:r>
-              <a:rPr sz="1500" b="1" i="0">
-                <a:solidFill>
-                  <a:srgbClr val="006E96"/>
-                </a:solidFill>
-                <a:latin typeface="Arial"/>
-              </a:rPr>
-              <a:t>Service</a:t>
-            </a:r>
-          </a:p>
-          <a:p>
-            <a:pPr algn="l">
-              <a:spcAft>
-                <a:spcPts val="300"/>
-              </a:spcAft>
-            </a:pPr>
-            <a:r>
-              <a:rPr sz="1250" b="0" i="0">
-                <a:solidFill>
-                  <a:srgbClr val="1A1A1A"/>
-                </a:solidFill>
-                <a:latin typeface="Arial"/>
-              </a:rPr>
-              <a:t>how it reaches a citizen or body</a:t>
-            </a:r>
-          </a:p>
-        </p:txBody>
-      </p:sp>
-      <p:sp>
-        <p:nvSpPr>
-          <p:cNvPr id="7" name="Rounded Rectangle 6"/>
-          <p:cNvSpPr/>
-          <p:nvPr/>
-        </p:nvSpPr>
-        <p:spPr>
-          <a:xfrm>
-            <a:off x="3246120" y="3246120"/>
-            <a:ext cx="2651760" cy="960120"/>
-          </a:xfrm>
-          <a:prstGeom prst="roundRect">
-            <a:avLst>
-              <a:gd name="adj" fmla="val 8000"/>
-            </a:avLst>
-          </a:prstGeom>
-          <a:solidFill>
-            <a:srgbClr val="E5F5FB"/>
-          </a:solidFill>
-          <a:ln>
-            <a:noFill/>
-          </a:ln>
-          <a:effectLst/>
-        </p:spPr>
-        <p:style>
-          <a:lnRef idx="1">
-            <a:schemeClr val="accent1"/>
-          </a:lnRef>
-          <a:fillRef idx="3">
-            <a:schemeClr val="accent1"/>
-          </a:fillRef>
-          <a:effectRef idx="2">
-            <a:schemeClr val="accent1"/>
-          </a:effectRef>
-          <a:fontRef idx="minor">
-            <a:schemeClr val="lt1"/>
-          </a:fontRef>
-        </p:style>
-        <p:txBody>
-          <a:bodyPr rtlCol="0" anchor="t" lIns="128016" rIns="128016" tIns="91440" bIns="54864" wrap="square"/>
-          <a:lstStyle/>
-          <a:p>
-            <a:pPr algn="l">
-              <a:spcAft>
-                <a:spcPts val="300"/>
-              </a:spcAft>
-            </a:pPr>
-            <a:r>
-              <a:rPr sz="1500" b="1" i="0">
-                <a:solidFill>
-                  <a:srgbClr val="006E96"/>
-                </a:solidFill>
-                <a:latin typeface="Arial"/>
-              </a:rPr>
-              <a:t>Application</a:t>
-            </a:r>
-          </a:p>
-          <a:p>
-            <a:pPr algn="l">
-              <a:spcAft>
-                <a:spcPts val="300"/>
-              </a:spcAft>
-            </a:pPr>
-            <a:r>
-              <a:rPr sz="1250" b="0" i="0">
-                <a:solidFill>
-                  <a:srgbClr val="1A1A1A"/>
-                </a:solidFill>
-                <a:latin typeface="Arial"/>
-              </a:rPr>
-              <a:t>the software that supports it</a:t>
-            </a:r>
-          </a:p>
-        </p:txBody>
-      </p:sp>
-      <p:sp>
-        <p:nvSpPr>
-          <p:cNvPr id="8" name="Rounded Rectangle 7"/>
-          <p:cNvSpPr/>
-          <p:nvPr/>
-        </p:nvSpPr>
-        <p:spPr>
-          <a:xfrm>
-            <a:off x="8183879" y="3246120"/>
-            <a:ext cx="2651760" cy="960120"/>
-          </a:xfrm>
-          <a:prstGeom prst="roundRect">
-            <a:avLst>
-              <a:gd name="adj" fmla="val 8000"/>
-            </a:avLst>
-          </a:prstGeom>
-          <a:solidFill>
-            <a:srgbClr val="E5F5FB"/>
-          </a:solidFill>
-          <a:ln>
-            <a:noFill/>
-          </a:ln>
-          <a:effectLst/>
-        </p:spPr>
-        <p:style>
-          <a:lnRef idx="1">
-            <a:schemeClr val="accent1"/>
-          </a:lnRef>
-          <a:fillRef idx="3">
-            <a:schemeClr val="accent1"/>
-          </a:fillRef>
-          <a:effectRef idx="2">
-            <a:schemeClr val="accent1"/>
-          </a:effectRef>
-          <a:fontRef idx="minor">
-            <a:schemeClr val="lt1"/>
-          </a:fontRef>
-        </p:style>
-        <p:txBody>
-          <a:bodyPr rtlCol="0" anchor="t" lIns="128016" rIns="128016" tIns="91440" bIns="54864" wrap="square"/>
-          <a:lstStyle/>
-          <a:p>
-            <a:pPr algn="l">
-              <a:spcAft>
-                <a:spcPts val="300"/>
-              </a:spcAft>
-            </a:pPr>
-            <a:r>
-              <a:rPr sz="1500" b="1" i="0">
-                <a:solidFill>
-                  <a:srgbClr val="006E96"/>
-                </a:solidFill>
-                <a:latin typeface="Arial"/>
-              </a:rPr>
-              <a:t>Data Domain</a:t>
-            </a:r>
-          </a:p>
-          <a:p>
-            <a:pPr algn="l">
-              <a:spcAft>
-                <a:spcPts val="300"/>
-              </a:spcAft>
-            </a:pPr>
-            <a:r>
-              <a:rPr sz="1250" b="0" i="0">
-                <a:solidFill>
-                  <a:srgbClr val="1A1A1A"/>
-                </a:solidFill>
-                <a:latin typeface="Arial"/>
-              </a:rPr>
-              <a:t>a kind of information, one owner</a:t>
-            </a:r>
-          </a:p>
-        </p:txBody>
-      </p:sp>
-      <p:sp>
-        <p:nvSpPr>
-          <p:cNvPr id="9" name="Rounded Rectangle 8"/>
-          <p:cNvSpPr/>
-          <p:nvPr/>
-        </p:nvSpPr>
-        <p:spPr>
-          <a:xfrm>
-            <a:off x="3246120" y="4617720"/>
-            <a:ext cx="7589520" cy="822960"/>
-          </a:xfrm>
-          <a:prstGeom prst="roundRect">
-            <a:avLst>
-              <a:gd name="adj" fmla="val 8000"/>
-            </a:avLst>
-          </a:prstGeom>
-          <a:solidFill>
-            <a:srgbClr val="006E96"/>
-          </a:solidFill>
-          <a:ln>
-            <a:noFill/>
-          </a:ln>
-          <a:effectLst/>
-        </p:spPr>
-        <p:style>
-          <a:lnRef idx="1">
-            <a:schemeClr val="accent1"/>
-          </a:lnRef>
-          <a:fillRef idx="3">
-            <a:schemeClr val="accent1"/>
-          </a:fillRef>
-          <a:effectRef idx="2">
-            <a:schemeClr val="accent1"/>
-          </a:effectRef>
-          <a:fontRef idx="minor">
-            <a:schemeClr val="lt1"/>
-          </a:fontRef>
-        </p:style>
-        <p:txBody>
-          <a:bodyPr rtlCol="0" anchor="t" lIns="128016" rIns="128016" tIns="91440" bIns="54864" wrap="square"/>
-          <a:lstStyle/>
-          <a:p>
-            <a:pPr algn="l">
-              <a:spcAft>
-                <a:spcPts val="300"/>
-              </a:spcAft>
-            </a:pPr>
-            <a:r>
-              <a:rPr sz="1500" b="1" i="0">
-                <a:solidFill>
-                  <a:srgbClr val="FFFFFF"/>
-                </a:solidFill>
-                <a:latin typeface="Arial"/>
-              </a:rPr>
-              <a:t>Technology Component</a:t>
-            </a:r>
-          </a:p>
-          <a:p>
-            <a:pPr algn="l">
-              <a:spcAft>
-                <a:spcPts val="300"/>
-              </a:spcAft>
-            </a:pPr>
-            <a:r>
-              <a:rPr sz="1250" b="0" i="0">
-                <a:solidFill>
-                  <a:srgbClr val="FFFFFF"/>
-                </a:solidFill>
-                <a:latin typeface="Arial"/>
-              </a:rPr>
-              <a:t>the infrastructure underneath</a:t>
-            </a:r>
-          </a:p>
-        </p:txBody>
-      </p:sp>
-      <p:cxnSp>
-        <p:nvCxnSpPr>
-          <p:cNvPr id="10" name="Connector 9"/>
-          <p:cNvCxnSpPr/>
-          <p:nvPr/>
-        </p:nvCxnSpPr>
-        <p:spPr>
-          <a:xfrm>
-            <a:off x="5897879" y="2080260"/>
-            <a:ext cx="2286000" cy="0"/>
-          </a:xfrm>
-          <a:prstGeom prst="line">
-            <a:avLst/>
-          </a:prstGeom>
-          <a:ln w="19050">
-            <a:solidFill>
-              <a:srgbClr val="006E96"/>
-            </a:solidFill>
-            <a:tailEnd type="triangle" w="med" len="med"/>
-          </a:ln>
-        </p:spPr>
-        <p:style>
-          <a:lnRef idx="2">
-            <a:schemeClr val="accent1"/>
-          </a:lnRef>
-          <a:fillRef idx="0">
-            <a:schemeClr val="accent1"/>
-          </a:fillRef>
-          <a:effectRef idx="1">
-            <a:schemeClr val="accent1"/>
-          </a:effectRef>
-          <a:fontRef idx="minor">
-            <a:schemeClr val="tx1"/>
-          </a:fontRef>
-        </p:style>
-      </p:cxnSp>
-      <p:sp>
-        <p:nvSpPr>
-          <p:cNvPr id="11" name="Rectangle 10"/>
-          <p:cNvSpPr/>
-          <p:nvPr/>
-        </p:nvSpPr>
-        <p:spPr>
-          <a:xfrm>
-            <a:off x="6400799" y="1897379"/>
-            <a:ext cx="1280160" cy="365760"/>
-          </a:xfrm>
-          <a:prstGeom prst="rect">
-            <a:avLst/>
-          </a:prstGeom>
-          <a:solidFill>
-            <a:srgbClr val="FFFFFF"/>
-          </a:solidFill>
-          <a:ln>
-            <a:noFill/>
-          </a:ln>
-          <a:effectLst/>
-        </p:spPr>
-        <p:style>
-          <a:lnRef idx="1">
-            <a:schemeClr val="accent1"/>
-          </a:lnRef>
-          <a:fillRef idx="3">
-            <a:schemeClr val="accent1"/>
-          </a:fillRef>
-          <a:effectRef idx="2">
-            <a:schemeClr val="accent1"/>
-          </a:effectRef>
-          <a:fontRef idx="minor">
-            <a:schemeClr val="lt1"/>
-          </a:fontRef>
-        </p:style>
-        <p:txBody>
-          <a:bodyPr rtlCol="0" anchor="ctr" lIns="36576" rIns="36576" tIns="0" bIns="0" wrap="square"/>
-          <a:lstStyle/>
-          <a:p>
-            <a:pPr algn="ctr"/>
             <a:r>
               <a:rPr sz="1200" b="1" i="0">
                 <a:solidFill>
@@ -13832,413 +11912,21 @@
                 </a:solidFill>
                 <a:latin typeface="Arial"/>
               </a:rPr>
-              <a:t>delivered by</a:t>
-            </a:r>
-          </a:p>
-        </p:txBody>
-      </p:sp>
-      <p:cxnSp>
-        <p:nvCxnSpPr>
-          <p:cNvPr id="12" name="Connector 11"/>
-          <p:cNvCxnSpPr/>
-          <p:nvPr/>
-        </p:nvCxnSpPr>
-        <p:spPr>
-          <a:xfrm>
-            <a:off x="4572000" y="2560320"/>
-            <a:ext cx="0" cy="685800"/>
-          </a:xfrm>
-          <a:prstGeom prst="line">
-            <a:avLst/>
-          </a:prstGeom>
-          <a:ln w="19050">
-            <a:solidFill>
-              <a:srgbClr val="006E96"/>
-            </a:solidFill>
-            <a:tailEnd type="triangle" w="med" len="med"/>
-          </a:ln>
-        </p:spPr>
-        <p:style>
-          <a:lnRef idx="2">
-            <a:schemeClr val="accent1"/>
-          </a:lnRef>
-          <a:fillRef idx="0">
-            <a:schemeClr val="accent1"/>
-          </a:fillRef>
-          <a:effectRef idx="1">
-            <a:schemeClr val="accent1"/>
-          </a:effectRef>
-          <a:fontRef idx="minor">
-            <a:schemeClr val="tx1"/>
-          </a:fontRef>
-        </p:style>
-      </p:cxnSp>
-      <p:sp>
-        <p:nvSpPr>
-          <p:cNvPr id="13" name="Rectangle 12"/>
-          <p:cNvSpPr/>
-          <p:nvPr/>
-        </p:nvSpPr>
-        <p:spPr>
-          <a:xfrm>
-            <a:off x="4681728" y="2715768"/>
-            <a:ext cx="1371600" cy="365760"/>
-          </a:xfrm>
-          <a:prstGeom prst="rect">
-            <a:avLst/>
-          </a:prstGeom>
-          <a:solidFill>
-            <a:srgbClr val="FFFFFF"/>
-          </a:solidFill>
-          <a:ln>
-            <a:noFill/>
-          </a:ln>
-          <a:effectLst/>
-        </p:spPr>
-        <p:style>
-          <a:lnRef idx="1">
-            <a:schemeClr val="accent1"/>
-          </a:lnRef>
-          <a:fillRef idx="3">
-            <a:schemeClr val="accent1"/>
-          </a:fillRef>
-          <a:effectRef idx="2">
-            <a:schemeClr val="accent1"/>
-          </a:effectRef>
-          <a:fontRef idx="minor">
-            <a:schemeClr val="lt1"/>
-          </a:fontRef>
-        </p:style>
-        <p:txBody>
-          <a:bodyPr rtlCol="0" anchor="ctr" lIns="36576" rIns="36576" tIns="0" bIns="0" wrap="square"/>
-          <a:lstStyle/>
-          <a:p>
-            <a:pPr algn="l"/>
-            <a:r>
-              <a:rPr sz="1200" b="1" i="0">
-                <a:solidFill>
-                  <a:srgbClr val="006E96"/>
-                </a:solidFill>
-                <a:latin typeface="Arial"/>
-              </a:rPr>
-              <a:t>supported by</a:t>
-            </a:r>
-          </a:p>
-        </p:txBody>
-      </p:sp>
-      <p:cxnSp>
-        <p:nvCxnSpPr>
-          <p:cNvPr id="14" name="Connector 13"/>
-          <p:cNvCxnSpPr/>
-          <p:nvPr/>
-        </p:nvCxnSpPr>
-        <p:spPr>
-          <a:xfrm>
-            <a:off x="5897879" y="3726180"/>
-            <a:ext cx="2286000" cy="0"/>
-          </a:xfrm>
-          <a:prstGeom prst="line">
-            <a:avLst/>
-          </a:prstGeom>
-          <a:ln w="19050">
-            <a:solidFill>
-              <a:srgbClr val="006E96"/>
-            </a:solidFill>
-            <a:tailEnd type="triangle" w="med" len="med"/>
-          </a:ln>
-        </p:spPr>
-        <p:style>
-          <a:lnRef idx="2">
-            <a:schemeClr val="accent1"/>
-          </a:lnRef>
-          <a:fillRef idx="0">
-            <a:schemeClr val="accent1"/>
-          </a:fillRef>
-          <a:effectRef idx="1">
-            <a:schemeClr val="accent1"/>
-          </a:effectRef>
-          <a:fontRef idx="minor">
-            <a:schemeClr val="tx1"/>
-          </a:fontRef>
-        </p:style>
-      </p:cxnSp>
-      <p:sp>
-        <p:nvSpPr>
-          <p:cNvPr id="15" name="Rectangle 14"/>
-          <p:cNvSpPr/>
-          <p:nvPr/>
-        </p:nvSpPr>
-        <p:spPr>
-          <a:xfrm>
-            <a:off x="6720840" y="3543300"/>
-            <a:ext cx="822960" cy="365760"/>
-          </a:xfrm>
-          <a:prstGeom prst="rect">
-            <a:avLst/>
-          </a:prstGeom>
-          <a:solidFill>
-            <a:srgbClr val="FFFFFF"/>
-          </a:solidFill>
-          <a:ln>
-            <a:noFill/>
-          </a:ln>
-          <a:effectLst/>
-        </p:spPr>
-        <p:style>
-          <a:lnRef idx="1">
-            <a:schemeClr val="accent1"/>
-          </a:lnRef>
-          <a:fillRef idx="3">
-            <a:schemeClr val="accent1"/>
-          </a:fillRef>
-          <a:effectRef idx="2">
-            <a:schemeClr val="accent1"/>
-          </a:effectRef>
-          <a:fontRef idx="minor">
-            <a:schemeClr val="lt1"/>
-          </a:fontRef>
-        </p:style>
-        <p:txBody>
-          <a:bodyPr rtlCol="0" anchor="ctr" lIns="36576" rIns="36576" tIns="0" bIns="0" wrap="square"/>
-          <a:lstStyle/>
-          <a:p>
-            <a:pPr algn="ctr"/>
-            <a:r>
-              <a:rPr sz="1200" b="1" i="0">
-                <a:solidFill>
-                  <a:srgbClr val="006E96"/>
-                </a:solidFill>
-                <a:latin typeface="Arial"/>
-              </a:rPr>
-              <a:t>uses</a:t>
-            </a:r>
-          </a:p>
-        </p:txBody>
-      </p:sp>
-      <p:cxnSp>
-        <p:nvCxnSpPr>
-          <p:cNvPr id="16" name="Connector 15"/>
-          <p:cNvCxnSpPr/>
-          <p:nvPr/>
-        </p:nvCxnSpPr>
-        <p:spPr>
-          <a:xfrm>
-            <a:off x="4572000" y="4206240"/>
-            <a:ext cx="0" cy="411480"/>
-          </a:xfrm>
-          <a:prstGeom prst="line">
-            <a:avLst/>
-          </a:prstGeom>
-          <a:ln w="19050">
-            <a:solidFill>
-              <a:srgbClr val="006E96"/>
-            </a:solidFill>
-            <a:tailEnd type="triangle" w="med" len="med"/>
-          </a:ln>
-        </p:spPr>
-        <p:style>
-          <a:lnRef idx="2">
-            <a:schemeClr val="accent1"/>
-          </a:lnRef>
-          <a:fillRef idx="0">
-            <a:schemeClr val="accent1"/>
-          </a:fillRef>
-          <a:effectRef idx="1">
-            <a:schemeClr val="accent1"/>
-          </a:effectRef>
-          <a:fontRef idx="minor">
-            <a:schemeClr val="tx1"/>
-          </a:fontRef>
-        </p:style>
-      </p:cxnSp>
-      <p:cxnSp>
-        <p:nvCxnSpPr>
-          <p:cNvPr id="17" name="Connector 16"/>
-          <p:cNvCxnSpPr/>
-          <p:nvPr/>
-        </p:nvCxnSpPr>
-        <p:spPr>
-          <a:xfrm>
-            <a:off x="9509759" y="4206240"/>
-            <a:ext cx="0" cy="411480"/>
-          </a:xfrm>
-          <a:prstGeom prst="line">
-            <a:avLst/>
-          </a:prstGeom>
-          <a:ln w="19050">
-            <a:solidFill>
-              <a:srgbClr val="006E96"/>
-            </a:solidFill>
-            <a:tailEnd type="triangle" w="med" len="med"/>
-          </a:ln>
-        </p:spPr>
-        <p:style>
-          <a:lnRef idx="2">
-            <a:schemeClr val="accent1"/>
-          </a:lnRef>
-          <a:fillRef idx="0">
-            <a:schemeClr val="accent1"/>
-          </a:fillRef>
-          <a:effectRef idx="1">
-            <a:schemeClr val="accent1"/>
-          </a:effectRef>
-          <a:fontRef idx="minor">
-            <a:schemeClr val="tx1"/>
-          </a:fontRef>
-        </p:style>
-      </p:cxnSp>
-      <p:sp>
-        <p:nvSpPr>
-          <p:cNvPr id="18" name="Rectangle 17"/>
-          <p:cNvSpPr/>
-          <p:nvPr/>
-        </p:nvSpPr>
-        <p:spPr>
-          <a:xfrm>
-            <a:off x="6172199" y="4251959"/>
-            <a:ext cx="1920240" cy="329184"/>
-          </a:xfrm>
-          <a:prstGeom prst="rect">
-            <a:avLst/>
-          </a:prstGeom>
-          <a:solidFill>
-            <a:srgbClr val="FFFFFF"/>
-          </a:solidFill>
-          <a:ln>
-            <a:noFill/>
-          </a:ln>
-          <a:effectLst/>
-        </p:spPr>
-        <p:style>
-          <a:lnRef idx="1">
-            <a:schemeClr val="accent1"/>
-          </a:lnRef>
-          <a:fillRef idx="3">
-            <a:schemeClr val="accent1"/>
-          </a:fillRef>
-          <a:effectRef idx="2">
-            <a:schemeClr val="accent1"/>
-          </a:effectRef>
-          <a:fontRef idx="minor">
-            <a:schemeClr val="lt1"/>
-          </a:fontRef>
-        </p:style>
-        <p:txBody>
-          <a:bodyPr rtlCol="0" anchor="ctr" lIns="36576" rIns="36576" tIns="0" bIns="0" wrap="square"/>
-          <a:lstStyle/>
-          <a:p>
-            <a:pPr algn="ctr"/>
-            <a:r>
-              <a:rPr sz="1200" b="1" i="0">
-                <a:solidFill>
-                  <a:srgbClr val="006E96"/>
-                </a:solidFill>
-                <a:latin typeface="Arial"/>
-              </a:rPr>
-              <a:t>everything runs on</a:t>
-            </a:r>
-          </a:p>
-        </p:txBody>
-      </p:sp>
-      <p:cxnSp>
-        <p:nvCxnSpPr>
-          <p:cNvPr id="19" name="Connector 18"/>
-          <p:cNvCxnSpPr/>
-          <p:nvPr/>
-        </p:nvCxnSpPr>
-        <p:spPr>
-          <a:xfrm>
-            <a:off x="2487168" y="3520440"/>
-            <a:ext cx="758952" cy="0"/>
-          </a:xfrm>
-          <a:prstGeom prst="line">
-            <a:avLst/>
-          </a:prstGeom>
-          <a:ln w="19050">
-            <a:solidFill>
-              <a:srgbClr val="006E96"/>
-            </a:solidFill>
-            <a:tailEnd type="triangle" w="med" len="med"/>
-          </a:ln>
-        </p:spPr>
-        <p:style>
-          <a:lnRef idx="2">
-            <a:schemeClr val="accent1"/>
-          </a:lnRef>
-          <a:fillRef idx="0">
-            <a:schemeClr val="accent1"/>
-          </a:fillRef>
-          <a:effectRef idx="1">
-            <a:schemeClr val="accent1"/>
-          </a:effectRef>
-          <a:fontRef idx="minor">
-            <a:schemeClr val="tx1"/>
-          </a:fontRef>
-        </p:style>
-      </p:cxnSp>
-      <p:sp>
-        <p:nvSpPr>
-          <p:cNvPr id="20" name="Rectangle 19"/>
-          <p:cNvSpPr/>
-          <p:nvPr/>
-        </p:nvSpPr>
-        <p:spPr>
-          <a:xfrm>
-            <a:off x="2505456" y="3136392"/>
-            <a:ext cx="731520" cy="329184"/>
-          </a:xfrm>
-          <a:prstGeom prst="rect">
-            <a:avLst/>
-          </a:prstGeom>
-          <a:solidFill>
-            <a:srgbClr val="FFFFFF"/>
-          </a:solidFill>
-          <a:ln>
-            <a:noFill/>
-          </a:ln>
-          <a:effectLst/>
-        </p:spPr>
-        <p:style>
-          <a:lnRef idx="1">
-            <a:schemeClr val="accent1"/>
-          </a:lnRef>
-          <a:fillRef idx="3">
-            <a:schemeClr val="accent1"/>
-          </a:fillRef>
-          <a:effectRef idx="2">
-            <a:schemeClr val="accent1"/>
-          </a:effectRef>
-          <a:fontRef idx="minor">
-            <a:schemeClr val="lt1"/>
-          </a:fontRef>
-        </p:style>
-        <p:txBody>
-          <a:bodyPr rtlCol="0" anchor="ctr" lIns="36576" rIns="36576" tIns="0" bIns="0" wrap="square"/>
-          <a:lstStyle/>
-          <a:p>
-            <a:pPr algn="ctr"/>
-            <a:r>
-              <a:rPr sz="1200" b="1" i="0">
-                <a:solidFill>
-                  <a:srgbClr val="006E96"/>
-                </a:solidFill>
-                <a:latin typeface="Arial"/>
-              </a:rPr>
-              <a:t>owns</a:t>
-            </a:r>
-          </a:p>
-        </p:txBody>
-      </p:sp>
-      <p:sp>
-        <p:nvSpPr>
-          <p:cNvPr id="21" name="TextBox 20"/>
+              <a:t>WHERE WE START</a:t>
+            </a:r>
+          </a:p>
+        </p:txBody>
+      </p:sp>
+      <p:sp>
+        <p:nvSpPr>
+          <p:cNvPr id="3" name="TextBox 2"/>
           <p:cNvSpPr txBox="1"/>
           <p:nvPr/>
         </p:nvSpPr>
         <p:spPr>
           <a:xfrm>
-            <a:off x="658368" y="5760720"/>
-            <a:ext cx="10881360" cy="548640"/>
+            <a:off x="1005840" y="1783080"/>
+            <a:ext cx="10149840" cy="1737360"/>
           </a:xfrm>
           <a:prstGeom prst="rect">
             <a:avLst/>
@@ -14252,20 +11940,91 @@
           <a:lstStyle/>
           <a:p>
             <a:r>
-              <a:rPr sz="1550" b="1" i="0">
+              <a:rPr sz="3000" b="1" i="0">
                 <a:solidFill>
-                  <a:srgbClr val="006E96"/>
+                  <a:srgbClr val="1A1A1A"/>
                 </a:solidFill>
                 <a:latin typeface="Arial"/>
               </a:rPr>
-              <a:t>These relationships are fixed. You do not invent them per ministry.</a:t>
-            </a:r>
-          </a:p>
-        </p:txBody>
-      </p:sp>
-      <p:sp>
-        <p:nvSpPr>
-          <p:cNvPr id="22" name="TextBox 21"/>
+              <a:t>Two ministries. Two architectures. Four words for two things.</a:t>
+            </a:r>
+          </a:p>
+        </p:txBody>
+      </p:sp>
+      <p:sp>
+        <p:nvSpPr>
+          <p:cNvPr id="4" name="TextBox 3"/>
+          <p:cNvSpPr txBox="1"/>
+          <p:nvPr/>
+        </p:nvSpPr>
+        <p:spPr>
+          <a:xfrm>
+            <a:off x="1005840" y="3611880"/>
+            <a:ext cx="10149840" cy="2377440"/>
+          </a:xfrm>
+          <a:prstGeom prst="rect">
+            <a:avLst/>
+          </a:prstGeom>
+          <a:noFill/>
+        </p:spPr>
+        <p:txBody>
+          <a:bodyPr wrap="square">
+            <a:spAutoFit/>
+          </a:bodyPr>
+          <a:lstStyle/>
+          <a:p>
+            <a:pPr>
+              <a:spcAft>
+                <a:spcPts val="800"/>
+              </a:spcAft>
+            </a:pPr>
+            <a:r>
+              <a:rPr sz="1700" b="0" i="0">
+                <a:solidFill>
+                  <a:srgbClr val="595959"/>
+                </a:solidFill>
+                <a:latin typeface="Arial"/>
+              </a:rPr>
+              <a:t>One calls a thing a “service”; the other calls the same thing a “function”.</a:t>
+            </a:r>
+          </a:p>
+          <a:p>
+            <a:pPr>
+              <a:spcAft>
+                <a:spcPts val="800"/>
+              </a:spcAft>
+            </a:pPr>
+            <a:r>
+              <a:rPr sz="1700" b="0" i="0">
+                <a:solidFill>
+                  <a:srgbClr val="595959"/>
+                </a:solidFill>
+                <a:latin typeface="Arial"/>
+              </a:rPr>
+              <a:t>One ministry’s “application” is another’s “system”.</a:t>
+            </a:r>
+          </a:p>
+          <a:p>
+            <a:pPr>
+              <a:spcAft>
+                <a:spcPts val="800"/>
+              </a:spcAft>
+            </a:pPr>
+            <a:r>
+              <a:rPr sz="1700" b="0" i="0">
+                <a:solidFill>
+                  <a:srgbClr val="595959"/>
+                </a:solidFill>
+                <a:latin typeface="Arial"/>
+              </a:rPr>
+              <a:t>You cannot compare them, connect them, or tell whether they are doing the same work twice.</a:t>
+            </a:r>
+          </a:p>
+        </p:txBody>
+      </p:sp>
+      <p:sp>
+        <p:nvSpPr>
+          <p:cNvPr id="5" name="TextBox 4"/>
           <p:cNvSpPr txBox="1"/>
           <p:nvPr/>
         </p:nvSpPr>
@@ -14293,6 +12052,41 @@
                 <a:latin typeface="Arial"/>
               </a:rPr>
               <a:t>2.2 · The shared vocabulary that makes re-use possible</a:t>
+            </a:r>
+          </a:p>
+        </p:txBody>
+      </p:sp>
+      <p:sp>
+        <p:nvSpPr>
+          <p:cNvPr id="6" name="TextBox 5"/>
+          <p:cNvSpPr txBox="1"/>
+          <p:nvPr/>
+        </p:nvSpPr>
+        <p:spPr>
+          <a:xfrm>
+            <a:off x="10058400" y="6473952"/>
+            <a:ext cx="1673352" cy="292608"/>
+          </a:xfrm>
+          <a:prstGeom prst="rect">
+            <a:avLst/>
+          </a:prstGeom>
+          <a:noFill/>
+        </p:spPr>
+        <p:txBody>
+          <a:bodyPr wrap="square">
+            <a:spAutoFit/>
+          </a:bodyPr>
+          <a:lstStyle/>
+          <a:p>
+            <a:pPr algn="r"/>
+            <a:r>
+              <a:rPr sz="900" b="0" i="0">
+                <a:solidFill>
+                  <a:srgbClr val="595959"/>
+                </a:solidFill>
+                <a:latin typeface="Arial"/>
+              </a:rPr>
+              <a:t>www.itu.int</a:t>
             </a:r>
           </a:p>
         </p:txBody>
@@ -14388,7 +12182,7 @@
                 </a:solidFill>
                 <a:latin typeface="Arial"/>
               </a:rPr>
-              <a:t>Re-use is not a matter of good intentions</a:t>
+              <a:t>A metamodel is a small shared dictionary</a:t>
             </a:r>
           </a:p>
         </p:txBody>
@@ -14401,8 +12195,8 @@
         </p:nvSpPr>
         <p:spPr>
           <a:xfrm>
-            <a:off x="658368" y="1600200"/>
-            <a:ext cx="10881360" cy="2651760"/>
+            <a:off x="658368" y="1417320"/>
+            <a:ext cx="10984687" cy="761999"/>
           </a:xfrm>
           <a:prstGeom prst="rect">
             <a:avLst/>
@@ -14417,55 +12211,152 @@
           <a:p>
             <a:pPr>
               <a:spcAft>
-                <a:spcPts val="1200"/>
+                <a:spcPts val="300"/>
               </a:spcAft>
             </a:pPr>
             <a:r>
-              <a:rPr sz="2000" b="0" i="0">
+              <a:rPr sz="1800" b="1" i="0">
                 <a:solidFill>
                   <a:srgbClr val="1A1A1A"/>
                 </a:solidFill>
                 <a:latin typeface="Arial"/>
               </a:rPr>
-              <a:t>Everyone says they want re-use — one identity system used by many ministries, instead of five. But before the agriculture ministry can consume the identity authority's building block, both must describe that building block the same way: same entity type, same relationships, same data domain.</a:t>
+              <a:t>Capability</a:t>
             </a:r>
           </a:p>
           <a:p>
             <a:pPr>
               <a:spcAft>
-                <a:spcPts val="1200"/>
+                <a:spcPts val="300"/>
               </a:spcAft>
             </a:pPr>
             <a:r>
-              <a:rPr sz="2000" b="0" i="0">
+              <a:rPr sz="1500" b="0" i="0">
+                <a:solidFill>
+                  <a:srgbClr val="595959"/>
+                </a:solidFill>
+                <a:latin typeface="Arial"/>
+              </a:rPr>
+              <a:t>Something a public body can do — register a learner, run an examination.</a:t>
+            </a:r>
+          </a:p>
+        </p:txBody>
+      </p:sp>
+      <p:sp>
+        <p:nvSpPr>
+          <p:cNvPr id="5" name="Rectangle 4"/>
+          <p:cNvSpPr/>
+          <p:nvPr/>
+        </p:nvSpPr>
+        <p:spPr>
+          <a:xfrm>
+            <a:off x="621792" y="2183892"/>
+            <a:ext cx="10881360" cy="12700"/>
+          </a:xfrm>
+          <a:prstGeom prst="rect">
+            <a:avLst/>
+          </a:prstGeom>
+          <a:solidFill>
+            <a:srgbClr val="DDECF4"/>
+          </a:solidFill>
+          <a:ln>
+            <a:noFill/>
+          </a:ln>
+          <a:effectLst/>
+        </p:spPr>
+        <p:style>
+          <a:lnRef idx="1">
+            <a:schemeClr val="accent1"/>
+          </a:lnRef>
+          <a:fillRef idx="3">
+            <a:schemeClr val="accent1"/>
+          </a:fillRef>
+          <a:effectRef idx="2">
+            <a:schemeClr val="accent1"/>
+          </a:effectRef>
+          <a:fontRef idx="minor">
+            <a:schemeClr val="lt1"/>
+          </a:fontRef>
+        </p:style>
+        <p:txBody>
+          <a:bodyPr rtlCol="0" anchor="ctr"/>
+          <a:lstStyle/>
+          <a:p>
+            <a:pPr algn="ctr"/>
+          </a:p>
+        </p:txBody>
+      </p:sp>
+      <p:sp>
+        <p:nvSpPr>
+          <p:cNvPr id="6" name="TextBox 5"/>
+          <p:cNvSpPr txBox="1"/>
+          <p:nvPr/>
+        </p:nvSpPr>
+        <p:spPr>
+          <a:xfrm>
+            <a:off x="658368" y="2225040"/>
+            <a:ext cx="10984687" cy="761999"/>
+          </a:xfrm>
+          <a:prstGeom prst="rect">
+            <a:avLst/>
+          </a:prstGeom>
+          <a:noFill/>
+        </p:spPr>
+        <p:txBody>
+          <a:bodyPr wrap="square">
+            <a:spAutoFit/>
+          </a:bodyPr>
+          <a:lstStyle/>
+          <a:p>
+            <a:pPr>
+              <a:spcAft>
+                <a:spcPts val="300"/>
+              </a:spcAft>
+            </a:pPr>
+            <a:r>
+              <a:rPr sz="1800" b="1" i="0">
                 <a:solidFill>
                   <a:srgbClr val="1A1A1A"/>
                 </a:solidFill>
                 <a:latin typeface="Arial"/>
               </a:rPr>
-              <a:t>If each ministry models in its own private language, re-use is impossible even when everyone wants it.</a:t>
-            </a:r>
-          </a:p>
-        </p:txBody>
-      </p:sp>
-      <p:sp>
-        <p:nvSpPr>
-          <p:cNvPr id="5" name="Rounded Rectangle 4"/>
+              <a:t>Service</a:t>
+            </a:r>
+          </a:p>
+          <a:p>
+            <a:pPr>
+              <a:spcAft>
+                <a:spcPts val="300"/>
+              </a:spcAft>
+            </a:pPr>
+            <a:r>
+              <a:rPr sz="1500" b="0" i="0">
+                <a:solidFill>
+                  <a:srgbClr val="595959"/>
+                </a:solidFill>
+                <a:latin typeface="Arial"/>
+              </a:rPr>
+              <a:t>How a capability reaches a citizen or another body.</a:t>
+            </a:r>
+          </a:p>
+        </p:txBody>
+      </p:sp>
+      <p:sp>
+        <p:nvSpPr>
+          <p:cNvPr id="7" name="Rectangle 6"/>
           <p:cNvSpPr/>
           <p:nvPr/>
         </p:nvSpPr>
         <p:spPr>
           <a:xfrm>
-            <a:off x="658368" y="4434840"/>
-            <a:ext cx="10881360" cy="1325880"/>
-          </a:xfrm>
-          <a:prstGeom prst="roundRect">
-            <a:avLst>
-              <a:gd name="adj" fmla="val 4500"/>
-            </a:avLst>
+            <a:off x="621792" y="2991612"/>
+            <a:ext cx="10881360" cy="12700"/>
+          </a:xfrm>
+          <a:prstGeom prst="rect">
+            <a:avLst/>
           </a:prstGeom>
           <a:solidFill>
-            <a:srgbClr val="009CD6"/>
+            <a:srgbClr val="DDECF4"/>
           </a:solidFill>
           <a:ln>
             <a:noFill/>
@@ -14496,14 +12387,14 @@
       </p:sp>
       <p:sp>
         <p:nvSpPr>
-          <p:cNvPr id="6" name="TextBox 5"/>
+          <p:cNvPr id="8" name="TextBox 7"/>
           <p:cNvSpPr txBox="1"/>
           <p:nvPr/>
         </p:nvSpPr>
         <p:spPr>
           <a:xfrm>
-            <a:off x="859536" y="4626864"/>
-            <a:ext cx="10479024" cy="1051560"/>
+            <a:off x="658368" y="3032760"/>
+            <a:ext cx="10984687" cy="761999"/>
           </a:xfrm>
           <a:prstGeom prst="rect">
             <a:avLst/>
@@ -14518,24 +12409,337 @@
           <a:p>
             <a:pPr>
               <a:spcAft>
-                <a:spcPts val="700"/>
+                <a:spcPts val="300"/>
               </a:spcAft>
             </a:pPr>
             <a:r>
-              <a:rPr sz="2300" b="1" i="0">
+              <a:rPr sz="1800" b="1" i="0">
                 <a:solidFill>
-                  <a:srgbClr val="FFFFFF"/>
+                  <a:srgbClr val="1A1A1A"/>
                 </a:solidFill>
                 <a:latin typeface="Arial"/>
               </a:rPr>
-              <a:t>The metamodel is the precondition for re-use.</a:t>
-            </a:r>
-          </a:p>
-        </p:txBody>
-      </p:sp>
-      <p:sp>
-        <p:nvSpPr>
-          <p:cNvPr id="7" name="TextBox 6"/>
+              <a:t>Application</a:t>
+            </a:r>
+          </a:p>
+          <a:p>
+            <a:pPr>
+              <a:spcAft>
+                <a:spcPts val="300"/>
+              </a:spcAft>
+            </a:pPr>
+            <a:r>
+              <a:rPr sz="1500" b="0" i="0">
+                <a:solidFill>
+                  <a:srgbClr val="595959"/>
+                </a:solidFill>
+                <a:latin typeface="Arial"/>
+              </a:rPr>
+              <a:t>The software that supports a capability.</a:t>
+            </a:r>
+          </a:p>
+        </p:txBody>
+      </p:sp>
+      <p:sp>
+        <p:nvSpPr>
+          <p:cNvPr id="9" name="Rectangle 8"/>
+          <p:cNvSpPr/>
+          <p:nvPr/>
+        </p:nvSpPr>
+        <p:spPr>
+          <a:xfrm>
+            <a:off x="621792" y="3799332"/>
+            <a:ext cx="10881360" cy="12700"/>
+          </a:xfrm>
+          <a:prstGeom prst="rect">
+            <a:avLst/>
+          </a:prstGeom>
+          <a:solidFill>
+            <a:srgbClr val="DDECF4"/>
+          </a:solidFill>
+          <a:ln>
+            <a:noFill/>
+          </a:ln>
+          <a:effectLst/>
+        </p:spPr>
+        <p:style>
+          <a:lnRef idx="1">
+            <a:schemeClr val="accent1"/>
+          </a:lnRef>
+          <a:fillRef idx="3">
+            <a:schemeClr val="accent1"/>
+          </a:fillRef>
+          <a:effectRef idx="2">
+            <a:schemeClr val="accent1"/>
+          </a:effectRef>
+          <a:fontRef idx="minor">
+            <a:schemeClr val="lt1"/>
+          </a:fontRef>
+        </p:style>
+        <p:txBody>
+          <a:bodyPr rtlCol="0" anchor="ctr"/>
+          <a:lstStyle/>
+          <a:p>
+            <a:pPr algn="ctr"/>
+          </a:p>
+        </p:txBody>
+      </p:sp>
+      <p:sp>
+        <p:nvSpPr>
+          <p:cNvPr id="10" name="TextBox 9"/>
+          <p:cNvSpPr txBox="1"/>
+          <p:nvPr/>
+        </p:nvSpPr>
+        <p:spPr>
+          <a:xfrm>
+            <a:off x="658368" y="3840480"/>
+            <a:ext cx="10984687" cy="761999"/>
+          </a:xfrm>
+          <a:prstGeom prst="rect">
+            <a:avLst/>
+          </a:prstGeom>
+          <a:noFill/>
+        </p:spPr>
+        <p:txBody>
+          <a:bodyPr wrap="square">
+            <a:spAutoFit/>
+          </a:bodyPr>
+          <a:lstStyle/>
+          <a:p>
+            <a:pPr>
+              <a:spcAft>
+                <a:spcPts val="300"/>
+              </a:spcAft>
+            </a:pPr>
+            <a:r>
+              <a:rPr sz="1800" b="1" i="0">
+                <a:solidFill>
+                  <a:srgbClr val="1A1A1A"/>
+                </a:solidFill>
+                <a:latin typeface="Arial"/>
+              </a:rPr>
+              <a:t>Data Domain</a:t>
+            </a:r>
+          </a:p>
+          <a:p>
+            <a:pPr>
+              <a:spcAft>
+                <a:spcPts val="300"/>
+              </a:spcAft>
+            </a:pPr>
+            <a:r>
+              <a:rPr sz="1500" b="0" i="0">
+                <a:solidFill>
+                  <a:srgbClr val="595959"/>
+                </a:solidFill>
+                <a:latin typeface="Arial"/>
+              </a:rPr>
+              <a:t>A kind of information, with one owner.</a:t>
+            </a:r>
+          </a:p>
+        </p:txBody>
+      </p:sp>
+      <p:sp>
+        <p:nvSpPr>
+          <p:cNvPr id="11" name="Rectangle 10"/>
+          <p:cNvSpPr/>
+          <p:nvPr/>
+        </p:nvSpPr>
+        <p:spPr>
+          <a:xfrm>
+            <a:off x="621792" y="4607052"/>
+            <a:ext cx="10881360" cy="12700"/>
+          </a:xfrm>
+          <a:prstGeom prst="rect">
+            <a:avLst/>
+          </a:prstGeom>
+          <a:solidFill>
+            <a:srgbClr val="DDECF4"/>
+          </a:solidFill>
+          <a:ln>
+            <a:noFill/>
+          </a:ln>
+          <a:effectLst/>
+        </p:spPr>
+        <p:style>
+          <a:lnRef idx="1">
+            <a:schemeClr val="accent1"/>
+          </a:lnRef>
+          <a:fillRef idx="3">
+            <a:schemeClr val="accent1"/>
+          </a:fillRef>
+          <a:effectRef idx="2">
+            <a:schemeClr val="accent1"/>
+          </a:effectRef>
+          <a:fontRef idx="minor">
+            <a:schemeClr val="lt1"/>
+          </a:fontRef>
+        </p:style>
+        <p:txBody>
+          <a:bodyPr rtlCol="0" anchor="ctr"/>
+          <a:lstStyle/>
+          <a:p>
+            <a:pPr algn="ctr"/>
+          </a:p>
+        </p:txBody>
+      </p:sp>
+      <p:sp>
+        <p:nvSpPr>
+          <p:cNvPr id="12" name="TextBox 11"/>
+          <p:cNvSpPr txBox="1"/>
+          <p:nvPr/>
+        </p:nvSpPr>
+        <p:spPr>
+          <a:xfrm>
+            <a:off x="658368" y="4648200"/>
+            <a:ext cx="10984687" cy="761999"/>
+          </a:xfrm>
+          <a:prstGeom prst="rect">
+            <a:avLst/>
+          </a:prstGeom>
+          <a:noFill/>
+        </p:spPr>
+        <p:txBody>
+          <a:bodyPr wrap="square">
+            <a:spAutoFit/>
+          </a:bodyPr>
+          <a:lstStyle/>
+          <a:p>
+            <a:pPr>
+              <a:spcAft>
+                <a:spcPts val="300"/>
+              </a:spcAft>
+            </a:pPr>
+            <a:r>
+              <a:rPr sz="1800" b="1" i="0">
+                <a:solidFill>
+                  <a:srgbClr val="1A1A1A"/>
+                </a:solidFill>
+                <a:latin typeface="Arial"/>
+              </a:rPr>
+              <a:t>Technology Component</a:t>
+            </a:r>
+          </a:p>
+          <a:p>
+            <a:pPr>
+              <a:spcAft>
+                <a:spcPts val="300"/>
+              </a:spcAft>
+            </a:pPr>
+            <a:r>
+              <a:rPr sz="1500" b="0" i="0">
+                <a:solidFill>
+                  <a:srgbClr val="595959"/>
+                </a:solidFill>
+                <a:latin typeface="Arial"/>
+              </a:rPr>
+              <a:t>The infrastructure underneath.</a:t>
+            </a:r>
+          </a:p>
+        </p:txBody>
+      </p:sp>
+      <p:sp>
+        <p:nvSpPr>
+          <p:cNvPr id="13" name="Rectangle 12"/>
+          <p:cNvSpPr/>
+          <p:nvPr/>
+        </p:nvSpPr>
+        <p:spPr>
+          <a:xfrm>
+            <a:off x="621792" y="5414771"/>
+            <a:ext cx="10881360" cy="12700"/>
+          </a:xfrm>
+          <a:prstGeom prst="rect">
+            <a:avLst/>
+          </a:prstGeom>
+          <a:solidFill>
+            <a:srgbClr val="DDECF4"/>
+          </a:solidFill>
+          <a:ln>
+            <a:noFill/>
+          </a:ln>
+          <a:effectLst/>
+        </p:spPr>
+        <p:style>
+          <a:lnRef idx="1">
+            <a:schemeClr val="accent1"/>
+          </a:lnRef>
+          <a:fillRef idx="3">
+            <a:schemeClr val="accent1"/>
+          </a:fillRef>
+          <a:effectRef idx="2">
+            <a:schemeClr val="accent1"/>
+          </a:effectRef>
+          <a:fontRef idx="minor">
+            <a:schemeClr val="lt1"/>
+          </a:fontRef>
+        </p:style>
+        <p:txBody>
+          <a:bodyPr rtlCol="0" anchor="ctr"/>
+          <a:lstStyle/>
+          <a:p>
+            <a:pPr algn="ctr"/>
+          </a:p>
+        </p:txBody>
+      </p:sp>
+      <p:sp>
+        <p:nvSpPr>
+          <p:cNvPr id="14" name="TextBox 13"/>
+          <p:cNvSpPr txBox="1"/>
+          <p:nvPr/>
+        </p:nvSpPr>
+        <p:spPr>
+          <a:xfrm>
+            <a:off x="658368" y="5455919"/>
+            <a:ext cx="10984687" cy="761999"/>
+          </a:xfrm>
+          <a:prstGeom prst="rect">
+            <a:avLst/>
+          </a:prstGeom>
+          <a:noFill/>
+        </p:spPr>
+        <p:txBody>
+          <a:bodyPr wrap="square">
+            <a:spAutoFit/>
+          </a:bodyPr>
+          <a:lstStyle/>
+          <a:p>
+            <a:pPr>
+              <a:spcAft>
+                <a:spcPts val="300"/>
+              </a:spcAft>
+            </a:pPr>
+            <a:r>
+              <a:rPr sz="1800" b="1" i="0">
+                <a:solidFill>
+                  <a:srgbClr val="1A1A1A"/>
+                </a:solidFill>
+                <a:latin typeface="Arial"/>
+              </a:rPr>
+              <a:t>Organisation</a:t>
+            </a:r>
+          </a:p>
+          <a:p>
+            <a:pPr>
+              <a:spcAft>
+                <a:spcPts val="300"/>
+              </a:spcAft>
+            </a:pPr>
+            <a:r>
+              <a:rPr sz="1500" b="0" i="0">
+                <a:solidFill>
+                  <a:srgbClr val="595959"/>
+                </a:solidFill>
+                <a:latin typeface="Arial"/>
+              </a:rPr>
+              <a:t>Owns each of these.</a:t>
+            </a:r>
+          </a:p>
+        </p:txBody>
+      </p:sp>
+      <p:sp>
+        <p:nvSpPr>
+          <p:cNvPr id="15" name="TextBox 14"/>
           <p:cNvSpPr txBox="1"/>
           <p:nvPr/>
         </p:nvSpPr>
@@ -14658,7 +12862,7 @@
                 </a:solidFill>
                 <a:latin typeface="Arial"/>
               </a:rPr>
-              <a:t>The same few entities let business and IT understand each other</a:t>
+              <a:t>The relationships matter as much as the entities</a:t>
             </a:r>
           </a:p>
         </p:txBody>
@@ -14671,12 +12875,87 @@
         </p:nvSpPr>
         <p:spPr>
           <a:xfrm>
-            <a:off x="658368" y="1554480"/>
-            <a:ext cx="5394960" cy="3977639"/>
+            <a:off x="658368" y="1600200"/>
+            <a:ext cx="1828800" cy="3840480"/>
           </a:xfrm>
           <a:prstGeom prst="roundRect">
             <a:avLst>
-              <a:gd name="adj" fmla="val 4500"/>
+              <a:gd name="adj" fmla="val 8000"/>
+            </a:avLst>
+          </a:prstGeom>
+          <a:solidFill>
+            <a:srgbClr val="F2F2F2"/>
+          </a:solidFill>
+          <a:ln>
+            <a:noFill/>
+          </a:ln>
+          <a:effectLst/>
+        </p:spPr>
+        <p:style>
+          <a:lnRef idx="1">
+            <a:schemeClr val="accent1"/>
+          </a:lnRef>
+          <a:fillRef idx="3">
+            <a:schemeClr val="accent1"/>
+          </a:fillRef>
+          <a:effectRef idx="2">
+            <a:schemeClr val="accent1"/>
+          </a:effectRef>
+          <a:fontRef idx="minor">
+            <a:schemeClr val="lt1"/>
+          </a:fontRef>
+        </p:style>
+        <p:txBody>
+          <a:bodyPr rtlCol="0" anchor="t" lIns="128016" rIns="128016" tIns="91440" bIns="54864" wrap="square"/>
+          <a:lstStyle/>
+          <a:p>
+            <a:pPr algn="l">
+              <a:spcAft>
+                <a:spcPts val="300"/>
+              </a:spcAft>
+            </a:pPr>
+            <a:r>
+              <a:rPr sz="1500" b="1" i="0">
+                <a:solidFill>
+                  <a:srgbClr val="006E96"/>
+                </a:solidFill>
+                <a:latin typeface="Arial"/>
+              </a:rPr>
+              <a:t>Organisation</a:t>
+            </a:r>
+          </a:p>
+          <a:p>
+            <a:pPr algn="l">
+              <a:spcAft>
+                <a:spcPts val="300"/>
+              </a:spcAft>
+            </a:pPr>
+            <a:r>
+              <a:rPr sz="1250" b="0" i="0">
+                <a:solidFill>
+                  <a:srgbClr val="1A1A1A"/>
+                </a:solidFill>
+                <a:latin typeface="Arial"/>
+              </a:rPr>
+              <a:t>owns each of them</a:t>
+            </a:r>
+          </a:p>
+        </p:txBody>
+      </p:sp>
+      <p:sp>
+        <p:nvSpPr>
+          <p:cNvPr id="5" name="Rounded Rectangle 4"/>
+          <p:cNvSpPr/>
+          <p:nvPr/>
+        </p:nvSpPr>
+        <p:spPr>
+          <a:xfrm>
+            <a:off x="3246120" y="1600200"/>
+            <a:ext cx="2651760" cy="960120"/>
+          </a:xfrm>
+          <a:prstGeom prst="roundRect">
+            <a:avLst>
+              <a:gd name="adj" fmla="val 8000"/>
             </a:avLst>
           </a:prstGeom>
           <a:solidFill>
@@ -14702,64 +12981,38 @@
           </a:fontRef>
         </p:style>
         <p:txBody>
-          <a:bodyPr rtlCol="0" anchor="ctr"/>
+          <a:bodyPr rtlCol="0" anchor="t" lIns="128016" rIns="128016" tIns="91440" bIns="54864" wrap="square"/>
           <a:lstStyle/>
           <a:p>
-            <a:pPr algn="ctr"/>
-          </a:p>
-        </p:txBody>
-      </p:sp>
-      <p:sp>
-        <p:nvSpPr>
-          <p:cNvPr id="5" name="TextBox 4"/>
-          <p:cNvSpPr txBox="1"/>
-          <p:nvPr/>
-        </p:nvSpPr>
-        <p:spPr>
-          <a:xfrm>
-            <a:off x="859536" y="1700784"/>
-            <a:ext cx="4992624" cy="3703320"/>
-          </a:xfrm>
-          <a:prstGeom prst="rect">
-            <a:avLst/>
-          </a:prstGeom>
-          <a:noFill/>
-        </p:spPr>
-        <p:txBody>
-          <a:bodyPr wrap="square">
-            <a:spAutoFit/>
-          </a:bodyPr>
-          <a:lstStyle/>
-          <a:p>
-            <a:pPr>
+            <a:pPr algn="l">
               <a:spcAft>
-                <a:spcPts val="700"/>
+                <a:spcPts val="300"/>
               </a:spcAft>
             </a:pPr>
             <a:r>
-              <a:rPr sz="1900" b="1" i="0">
+              <a:rPr sz="1500" b="1" i="0">
                 <a:solidFill>
                   <a:srgbClr val="006E96"/>
                 </a:solidFill>
                 <a:latin typeface="Arial"/>
               </a:rPr>
-              <a:t>The head of policy says</a:t>
-            </a:r>
-          </a:p>
-          <a:p>
-            <a:pPr>
+              <a:t>Capability</a:t>
+            </a:r>
+          </a:p>
+          <a:p>
+            <a:pPr algn="l">
               <a:spcAft>
-                <a:spcPts val="700"/>
+                <a:spcPts val="300"/>
               </a:spcAft>
             </a:pPr>
             <a:r>
-              <a:rPr sz="1600" b="0" i="0">
+              <a:rPr sz="1250" b="0" i="0">
                 <a:solidFill>
                   <a:srgbClr val="1A1A1A"/>
                 </a:solidFill>
                 <a:latin typeface="Arial"/>
               </a:rPr>
-              <a:t>“We want to register every learner once.”</a:t>
+              <a:t>what a body can do</a:t>
             </a:r>
           </a:p>
         </p:txBody>
@@ -14772,16 +13025,16 @@
         </p:nvSpPr>
         <p:spPr>
           <a:xfrm>
-            <a:off x="6263640" y="1554480"/>
-            <a:ext cx="5394960" cy="3977639"/>
+            <a:off x="8183879" y="1600200"/>
+            <a:ext cx="2651760" cy="960120"/>
           </a:xfrm>
           <a:prstGeom prst="roundRect">
             <a:avLst>
-              <a:gd name="adj" fmla="val 4500"/>
+              <a:gd name="adj" fmla="val 8000"/>
             </a:avLst>
           </a:prstGeom>
           <a:solidFill>
-            <a:srgbClr val="F2F2F2"/>
+            <a:srgbClr val="E5F5FB"/>
           </a:solidFill>
           <a:ln>
             <a:noFill/>
@@ -14803,109 +13056,757 @@
           </a:fontRef>
         </p:style>
         <p:txBody>
-          <a:bodyPr rtlCol="0" anchor="ctr"/>
+          <a:bodyPr rtlCol="0" anchor="t" lIns="128016" rIns="128016" tIns="91440" bIns="54864" wrap="square"/>
           <a:lstStyle/>
           <a:p>
-            <a:pPr algn="ctr"/>
-          </a:p>
-        </p:txBody>
-      </p:sp>
-      <p:sp>
-        <p:nvSpPr>
-          <p:cNvPr id="7" name="TextBox 6"/>
-          <p:cNvSpPr txBox="1"/>
-          <p:nvPr/>
-        </p:nvSpPr>
-        <p:spPr>
-          <a:xfrm>
-            <a:off x="6464808" y="1700784"/>
-            <a:ext cx="4992624" cy="3703320"/>
-          </a:xfrm>
-          <a:prstGeom prst="rect">
-            <a:avLst/>
-          </a:prstGeom>
-          <a:noFill/>
-        </p:spPr>
-        <p:txBody>
-          <a:bodyPr wrap="square">
-            <a:spAutoFit/>
-          </a:bodyPr>
-          <a:lstStyle/>
-          <a:p>
-            <a:pPr>
+            <a:pPr algn="l">
               <a:spcAft>
-                <a:spcPts val="700"/>
+                <a:spcPts val="300"/>
               </a:spcAft>
             </a:pPr>
             <a:r>
-              <a:rPr sz="1900" b="1" i="0">
+              <a:rPr sz="1500" b="1" i="0">
                 <a:solidFill>
                   <a:srgbClr val="006E96"/>
                 </a:solidFill>
                 <a:latin typeface="Arial"/>
               </a:rPr>
-              <a:t>The architect answers</a:t>
-            </a:r>
-          </a:p>
-          <a:p>
-            <a:pPr>
+              <a:t>Service</a:t>
+            </a:r>
+          </a:p>
+          <a:p>
+            <a:pPr algn="l">
               <a:spcAft>
-                <a:spcPts val="700"/>
+                <a:spcPts val="300"/>
               </a:spcAft>
             </a:pPr>
             <a:r>
-              <a:rPr sz="1600" b="0" i="0">
+              <a:rPr sz="1250" b="0" i="0">
                 <a:solidFill>
                   <a:srgbClr val="1A1A1A"/>
                 </a:solidFill>
                 <a:latin typeface="Arial"/>
               </a:rPr>
-              <a:t>“That is one Capability,</a:t>
-            </a:r>
-          </a:p>
-          <a:p>
-            <a:pPr>
+              <a:t>how it reaches a citizen or body</a:t>
+            </a:r>
+          </a:p>
+        </p:txBody>
+      </p:sp>
+      <p:sp>
+        <p:nvSpPr>
+          <p:cNvPr id="7" name="Rounded Rectangle 6"/>
+          <p:cNvSpPr/>
+          <p:nvPr/>
+        </p:nvSpPr>
+        <p:spPr>
+          <a:xfrm>
+            <a:off x="3246120" y="3246120"/>
+            <a:ext cx="2651760" cy="960120"/>
+          </a:xfrm>
+          <a:prstGeom prst="roundRect">
+            <a:avLst>
+              <a:gd name="adj" fmla="val 8000"/>
+            </a:avLst>
+          </a:prstGeom>
+          <a:solidFill>
+            <a:srgbClr val="E5F5FB"/>
+          </a:solidFill>
+          <a:ln>
+            <a:noFill/>
+          </a:ln>
+          <a:effectLst/>
+        </p:spPr>
+        <p:style>
+          <a:lnRef idx="1">
+            <a:schemeClr val="accent1"/>
+          </a:lnRef>
+          <a:fillRef idx="3">
+            <a:schemeClr val="accent1"/>
+          </a:fillRef>
+          <a:effectRef idx="2">
+            <a:schemeClr val="accent1"/>
+          </a:effectRef>
+          <a:fontRef idx="minor">
+            <a:schemeClr val="lt1"/>
+          </a:fontRef>
+        </p:style>
+        <p:txBody>
+          <a:bodyPr rtlCol="0" anchor="t" lIns="128016" rIns="128016" tIns="91440" bIns="54864" wrap="square"/>
+          <a:lstStyle/>
+          <a:p>
+            <a:pPr algn="l">
               <a:spcAft>
-                <a:spcPts val="700"/>
+                <a:spcPts val="300"/>
               </a:spcAft>
             </a:pPr>
             <a:r>
-              <a:rPr sz="1600" b="0" i="0">
+              <a:rPr sz="1500" b="1" i="0">
+                <a:solidFill>
+                  <a:srgbClr val="006E96"/>
+                </a:solidFill>
+                <a:latin typeface="Arial"/>
+              </a:rPr>
+              <a:t>Application</a:t>
+            </a:r>
+          </a:p>
+          <a:p>
+            <a:pPr algn="l">
+              <a:spcAft>
+                <a:spcPts val="300"/>
+              </a:spcAft>
+            </a:pPr>
+            <a:r>
+              <a:rPr sz="1250" b="0" i="0">
                 <a:solidFill>
                   <a:srgbClr val="1A1A1A"/>
                 </a:solidFill>
                 <a:latin typeface="Arial"/>
               </a:rPr>
-              <a:t>one Service,</a:t>
-            </a:r>
-          </a:p>
-          <a:p>
-            <a:pPr>
+              <a:t>the software that supports it</a:t>
+            </a:r>
+          </a:p>
+        </p:txBody>
+      </p:sp>
+      <p:sp>
+        <p:nvSpPr>
+          <p:cNvPr id="8" name="Rounded Rectangle 7"/>
+          <p:cNvSpPr/>
+          <p:nvPr/>
+        </p:nvSpPr>
+        <p:spPr>
+          <a:xfrm>
+            <a:off x="8183879" y="3246120"/>
+            <a:ext cx="2651760" cy="960120"/>
+          </a:xfrm>
+          <a:prstGeom prst="roundRect">
+            <a:avLst>
+              <a:gd name="adj" fmla="val 8000"/>
+            </a:avLst>
+          </a:prstGeom>
+          <a:solidFill>
+            <a:srgbClr val="E5F5FB"/>
+          </a:solidFill>
+          <a:ln>
+            <a:noFill/>
+          </a:ln>
+          <a:effectLst/>
+        </p:spPr>
+        <p:style>
+          <a:lnRef idx="1">
+            <a:schemeClr val="accent1"/>
+          </a:lnRef>
+          <a:fillRef idx="3">
+            <a:schemeClr val="accent1"/>
+          </a:fillRef>
+          <a:effectRef idx="2">
+            <a:schemeClr val="accent1"/>
+          </a:effectRef>
+          <a:fontRef idx="minor">
+            <a:schemeClr val="lt1"/>
+          </a:fontRef>
+        </p:style>
+        <p:txBody>
+          <a:bodyPr rtlCol="0" anchor="t" lIns="128016" rIns="128016" tIns="91440" bIns="54864" wrap="square"/>
+          <a:lstStyle/>
+          <a:p>
+            <a:pPr algn="l">
               <a:spcAft>
-                <a:spcPts val="700"/>
+                <a:spcPts val="300"/>
               </a:spcAft>
             </a:pPr>
             <a:r>
-              <a:rPr sz="1600" b="0" i="0">
+              <a:rPr sz="1500" b="1" i="0">
+                <a:solidFill>
+                  <a:srgbClr val="006E96"/>
+                </a:solidFill>
+                <a:latin typeface="Arial"/>
+              </a:rPr>
+              <a:t>Data Domain</a:t>
+            </a:r>
+          </a:p>
+          <a:p>
+            <a:pPr algn="l">
+              <a:spcAft>
+                <a:spcPts val="300"/>
+              </a:spcAft>
+            </a:pPr>
+            <a:r>
+              <a:rPr sz="1250" b="0" i="0">
                 <a:solidFill>
                   <a:srgbClr val="1A1A1A"/>
                 </a:solidFill>
                 <a:latin typeface="Arial"/>
               </a:rPr>
-              <a:t>and one Data Domain owned by the learner registry.”</a:t>
-            </a:r>
-          </a:p>
-        </p:txBody>
-      </p:sp>
-      <p:sp>
-        <p:nvSpPr>
-          <p:cNvPr id="8" name="TextBox 7"/>
+              <a:t>a kind of information, one owner</a:t>
+            </a:r>
+          </a:p>
+        </p:txBody>
+      </p:sp>
+      <p:sp>
+        <p:nvSpPr>
+          <p:cNvPr id="9" name="Rounded Rectangle 8"/>
+          <p:cNvSpPr/>
+          <p:nvPr/>
+        </p:nvSpPr>
+        <p:spPr>
+          <a:xfrm>
+            <a:off x="3246120" y="4617720"/>
+            <a:ext cx="7589520" cy="822960"/>
+          </a:xfrm>
+          <a:prstGeom prst="roundRect">
+            <a:avLst>
+              <a:gd name="adj" fmla="val 8000"/>
+            </a:avLst>
+          </a:prstGeom>
+          <a:solidFill>
+            <a:srgbClr val="006E96"/>
+          </a:solidFill>
+          <a:ln>
+            <a:noFill/>
+          </a:ln>
+          <a:effectLst/>
+        </p:spPr>
+        <p:style>
+          <a:lnRef idx="1">
+            <a:schemeClr val="accent1"/>
+          </a:lnRef>
+          <a:fillRef idx="3">
+            <a:schemeClr val="accent1"/>
+          </a:fillRef>
+          <a:effectRef idx="2">
+            <a:schemeClr val="accent1"/>
+          </a:effectRef>
+          <a:fontRef idx="minor">
+            <a:schemeClr val="lt1"/>
+          </a:fontRef>
+        </p:style>
+        <p:txBody>
+          <a:bodyPr rtlCol="0" anchor="t" lIns="128016" rIns="128016" tIns="91440" bIns="54864" wrap="square"/>
+          <a:lstStyle/>
+          <a:p>
+            <a:pPr algn="l">
+              <a:spcAft>
+                <a:spcPts val="300"/>
+              </a:spcAft>
+            </a:pPr>
+            <a:r>
+              <a:rPr sz="1500" b="1" i="0">
+                <a:solidFill>
+                  <a:srgbClr val="FFFFFF"/>
+                </a:solidFill>
+                <a:latin typeface="Arial"/>
+              </a:rPr>
+              <a:t>Technology Component</a:t>
+            </a:r>
+          </a:p>
+          <a:p>
+            <a:pPr algn="l">
+              <a:spcAft>
+                <a:spcPts val="300"/>
+              </a:spcAft>
+            </a:pPr>
+            <a:r>
+              <a:rPr sz="1250" b="0" i="0">
+                <a:solidFill>
+                  <a:srgbClr val="FFFFFF"/>
+                </a:solidFill>
+                <a:latin typeface="Arial"/>
+              </a:rPr>
+              <a:t>the infrastructure underneath</a:t>
+            </a:r>
+          </a:p>
+        </p:txBody>
+      </p:sp>
+      <p:cxnSp>
+        <p:nvCxnSpPr>
+          <p:cNvPr id="10" name="Connector 9"/>
+          <p:cNvCxnSpPr/>
+          <p:nvPr/>
+        </p:nvCxnSpPr>
+        <p:spPr>
+          <a:xfrm>
+            <a:off x="5897879" y="2080260"/>
+            <a:ext cx="2286000" cy="0"/>
+          </a:xfrm>
+          <a:prstGeom prst="line">
+            <a:avLst/>
+          </a:prstGeom>
+          <a:ln w="19050">
+            <a:solidFill>
+              <a:srgbClr val="006E96"/>
+            </a:solidFill>
+            <a:tailEnd type="triangle" w="med" len="med"/>
+          </a:ln>
+        </p:spPr>
+        <p:style>
+          <a:lnRef idx="2">
+            <a:schemeClr val="accent1"/>
+          </a:lnRef>
+          <a:fillRef idx="0">
+            <a:schemeClr val="accent1"/>
+          </a:fillRef>
+          <a:effectRef idx="1">
+            <a:schemeClr val="accent1"/>
+          </a:effectRef>
+          <a:fontRef idx="minor">
+            <a:schemeClr val="tx1"/>
+          </a:fontRef>
+        </p:style>
+      </p:cxnSp>
+      <p:sp>
+        <p:nvSpPr>
+          <p:cNvPr id="11" name="Rectangle 10"/>
+          <p:cNvSpPr/>
+          <p:nvPr/>
+        </p:nvSpPr>
+        <p:spPr>
+          <a:xfrm>
+            <a:off x="6400799" y="1897379"/>
+            <a:ext cx="1280160" cy="365760"/>
+          </a:xfrm>
+          <a:prstGeom prst="rect">
+            <a:avLst/>
+          </a:prstGeom>
+          <a:solidFill>
+            <a:srgbClr val="FFFFFF"/>
+          </a:solidFill>
+          <a:ln>
+            <a:noFill/>
+          </a:ln>
+          <a:effectLst/>
+        </p:spPr>
+        <p:style>
+          <a:lnRef idx="1">
+            <a:schemeClr val="accent1"/>
+          </a:lnRef>
+          <a:fillRef idx="3">
+            <a:schemeClr val="accent1"/>
+          </a:fillRef>
+          <a:effectRef idx="2">
+            <a:schemeClr val="accent1"/>
+          </a:effectRef>
+          <a:fontRef idx="minor">
+            <a:schemeClr val="lt1"/>
+          </a:fontRef>
+        </p:style>
+        <p:txBody>
+          <a:bodyPr rtlCol="0" anchor="ctr" lIns="36576" rIns="36576" tIns="0" bIns="0" wrap="square"/>
+          <a:lstStyle/>
+          <a:p>
+            <a:pPr algn="ctr"/>
+            <a:r>
+              <a:rPr sz="1200" b="1" i="0">
+                <a:solidFill>
+                  <a:srgbClr val="006E96"/>
+                </a:solidFill>
+                <a:latin typeface="Arial"/>
+              </a:rPr>
+              <a:t>delivered by</a:t>
+            </a:r>
+          </a:p>
+        </p:txBody>
+      </p:sp>
+      <p:cxnSp>
+        <p:nvCxnSpPr>
+          <p:cNvPr id="12" name="Connector 11"/>
+          <p:cNvCxnSpPr/>
+          <p:nvPr/>
+        </p:nvCxnSpPr>
+        <p:spPr>
+          <a:xfrm>
+            <a:off x="4572000" y="2560320"/>
+            <a:ext cx="0" cy="685800"/>
+          </a:xfrm>
+          <a:prstGeom prst="line">
+            <a:avLst/>
+          </a:prstGeom>
+          <a:ln w="19050">
+            <a:solidFill>
+              <a:srgbClr val="006E96"/>
+            </a:solidFill>
+            <a:tailEnd type="triangle" w="med" len="med"/>
+          </a:ln>
+        </p:spPr>
+        <p:style>
+          <a:lnRef idx="2">
+            <a:schemeClr val="accent1"/>
+          </a:lnRef>
+          <a:fillRef idx="0">
+            <a:schemeClr val="accent1"/>
+          </a:fillRef>
+          <a:effectRef idx="1">
+            <a:schemeClr val="accent1"/>
+          </a:effectRef>
+          <a:fontRef idx="minor">
+            <a:schemeClr val="tx1"/>
+          </a:fontRef>
+        </p:style>
+      </p:cxnSp>
+      <p:sp>
+        <p:nvSpPr>
+          <p:cNvPr id="13" name="Rectangle 12"/>
+          <p:cNvSpPr/>
+          <p:nvPr/>
+        </p:nvSpPr>
+        <p:spPr>
+          <a:xfrm>
+            <a:off x="4681728" y="2715768"/>
+            <a:ext cx="1371600" cy="365760"/>
+          </a:xfrm>
+          <a:prstGeom prst="rect">
+            <a:avLst/>
+          </a:prstGeom>
+          <a:solidFill>
+            <a:srgbClr val="FFFFFF"/>
+          </a:solidFill>
+          <a:ln>
+            <a:noFill/>
+          </a:ln>
+          <a:effectLst/>
+        </p:spPr>
+        <p:style>
+          <a:lnRef idx="1">
+            <a:schemeClr val="accent1"/>
+          </a:lnRef>
+          <a:fillRef idx="3">
+            <a:schemeClr val="accent1"/>
+          </a:fillRef>
+          <a:effectRef idx="2">
+            <a:schemeClr val="accent1"/>
+          </a:effectRef>
+          <a:fontRef idx="minor">
+            <a:schemeClr val="lt1"/>
+          </a:fontRef>
+        </p:style>
+        <p:txBody>
+          <a:bodyPr rtlCol="0" anchor="ctr" lIns="36576" rIns="36576" tIns="0" bIns="0" wrap="square"/>
+          <a:lstStyle/>
+          <a:p>
+            <a:pPr algn="l"/>
+            <a:r>
+              <a:rPr sz="1200" b="1" i="0">
+                <a:solidFill>
+                  <a:srgbClr val="006E96"/>
+                </a:solidFill>
+                <a:latin typeface="Arial"/>
+              </a:rPr>
+              <a:t>supported by</a:t>
+            </a:r>
+          </a:p>
+        </p:txBody>
+      </p:sp>
+      <p:cxnSp>
+        <p:nvCxnSpPr>
+          <p:cNvPr id="14" name="Connector 13"/>
+          <p:cNvCxnSpPr/>
+          <p:nvPr/>
+        </p:nvCxnSpPr>
+        <p:spPr>
+          <a:xfrm>
+            <a:off x="5897879" y="3726180"/>
+            <a:ext cx="2286000" cy="0"/>
+          </a:xfrm>
+          <a:prstGeom prst="line">
+            <a:avLst/>
+          </a:prstGeom>
+          <a:ln w="19050">
+            <a:solidFill>
+              <a:srgbClr val="006E96"/>
+            </a:solidFill>
+            <a:tailEnd type="triangle" w="med" len="med"/>
+          </a:ln>
+        </p:spPr>
+        <p:style>
+          <a:lnRef idx="2">
+            <a:schemeClr val="accent1"/>
+          </a:lnRef>
+          <a:fillRef idx="0">
+            <a:schemeClr val="accent1"/>
+          </a:fillRef>
+          <a:effectRef idx="1">
+            <a:schemeClr val="accent1"/>
+          </a:effectRef>
+          <a:fontRef idx="minor">
+            <a:schemeClr val="tx1"/>
+          </a:fontRef>
+        </p:style>
+      </p:cxnSp>
+      <p:sp>
+        <p:nvSpPr>
+          <p:cNvPr id="15" name="Rectangle 14"/>
+          <p:cNvSpPr/>
+          <p:nvPr/>
+        </p:nvSpPr>
+        <p:spPr>
+          <a:xfrm>
+            <a:off x="6720840" y="3543300"/>
+            <a:ext cx="822960" cy="365760"/>
+          </a:xfrm>
+          <a:prstGeom prst="rect">
+            <a:avLst/>
+          </a:prstGeom>
+          <a:solidFill>
+            <a:srgbClr val="FFFFFF"/>
+          </a:solidFill>
+          <a:ln>
+            <a:noFill/>
+          </a:ln>
+          <a:effectLst/>
+        </p:spPr>
+        <p:style>
+          <a:lnRef idx="1">
+            <a:schemeClr val="accent1"/>
+          </a:lnRef>
+          <a:fillRef idx="3">
+            <a:schemeClr val="accent1"/>
+          </a:fillRef>
+          <a:effectRef idx="2">
+            <a:schemeClr val="accent1"/>
+          </a:effectRef>
+          <a:fontRef idx="minor">
+            <a:schemeClr val="lt1"/>
+          </a:fontRef>
+        </p:style>
+        <p:txBody>
+          <a:bodyPr rtlCol="0" anchor="ctr" lIns="36576" rIns="36576" tIns="0" bIns="0" wrap="square"/>
+          <a:lstStyle/>
+          <a:p>
+            <a:pPr algn="ctr"/>
+            <a:r>
+              <a:rPr sz="1200" b="1" i="0">
+                <a:solidFill>
+                  <a:srgbClr val="006E96"/>
+                </a:solidFill>
+                <a:latin typeface="Arial"/>
+              </a:rPr>
+              <a:t>uses</a:t>
+            </a:r>
+          </a:p>
+        </p:txBody>
+      </p:sp>
+      <p:cxnSp>
+        <p:nvCxnSpPr>
+          <p:cNvPr id="16" name="Connector 15"/>
+          <p:cNvCxnSpPr/>
+          <p:nvPr/>
+        </p:nvCxnSpPr>
+        <p:spPr>
+          <a:xfrm>
+            <a:off x="4572000" y="4206240"/>
+            <a:ext cx="0" cy="411480"/>
+          </a:xfrm>
+          <a:prstGeom prst="line">
+            <a:avLst/>
+          </a:prstGeom>
+          <a:ln w="19050">
+            <a:solidFill>
+              <a:srgbClr val="006E96"/>
+            </a:solidFill>
+            <a:tailEnd type="triangle" w="med" len="med"/>
+          </a:ln>
+        </p:spPr>
+        <p:style>
+          <a:lnRef idx="2">
+            <a:schemeClr val="accent1"/>
+          </a:lnRef>
+          <a:fillRef idx="0">
+            <a:schemeClr val="accent1"/>
+          </a:fillRef>
+          <a:effectRef idx="1">
+            <a:schemeClr val="accent1"/>
+          </a:effectRef>
+          <a:fontRef idx="minor">
+            <a:schemeClr val="tx1"/>
+          </a:fontRef>
+        </p:style>
+      </p:cxnSp>
+      <p:cxnSp>
+        <p:nvCxnSpPr>
+          <p:cNvPr id="17" name="Connector 16"/>
+          <p:cNvCxnSpPr/>
+          <p:nvPr/>
+        </p:nvCxnSpPr>
+        <p:spPr>
+          <a:xfrm>
+            <a:off x="9509759" y="4206240"/>
+            <a:ext cx="0" cy="411480"/>
+          </a:xfrm>
+          <a:prstGeom prst="line">
+            <a:avLst/>
+          </a:prstGeom>
+          <a:ln w="19050">
+            <a:solidFill>
+              <a:srgbClr val="006E96"/>
+            </a:solidFill>
+            <a:tailEnd type="triangle" w="med" len="med"/>
+          </a:ln>
+        </p:spPr>
+        <p:style>
+          <a:lnRef idx="2">
+            <a:schemeClr val="accent1"/>
+          </a:lnRef>
+          <a:fillRef idx="0">
+            <a:schemeClr val="accent1"/>
+          </a:fillRef>
+          <a:effectRef idx="1">
+            <a:schemeClr val="accent1"/>
+          </a:effectRef>
+          <a:fontRef idx="minor">
+            <a:schemeClr val="tx1"/>
+          </a:fontRef>
+        </p:style>
+      </p:cxnSp>
+      <p:sp>
+        <p:nvSpPr>
+          <p:cNvPr id="18" name="Rectangle 17"/>
+          <p:cNvSpPr/>
+          <p:nvPr/>
+        </p:nvSpPr>
+        <p:spPr>
+          <a:xfrm>
+            <a:off x="6172199" y="4251959"/>
+            <a:ext cx="1920240" cy="329184"/>
+          </a:xfrm>
+          <a:prstGeom prst="rect">
+            <a:avLst/>
+          </a:prstGeom>
+          <a:solidFill>
+            <a:srgbClr val="FFFFFF"/>
+          </a:solidFill>
+          <a:ln>
+            <a:noFill/>
+          </a:ln>
+          <a:effectLst/>
+        </p:spPr>
+        <p:style>
+          <a:lnRef idx="1">
+            <a:schemeClr val="accent1"/>
+          </a:lnRef>
+          <a:fillRef idx="3">
+            <a:schemeClr val="accent1"/>
+          </a:fillRef>
+          <a:effectRef idx="2">
+            <a:schemeClr val="accent1"/>
+          </a:effectRef>
+          <a:fontRef idx="minor">
+            <a:schemeClr val="lt1"/>
+          </a:fontRef>
+        </p:style>
+        <p:txBody>
+          <a:bodyPr rtlCol="0" anchor="ctr" lIns="36576" rIns="36576" tIns="0" bIns="0" wrap="square"/>
+          <a:lstStyle/>
+          <a:p>
+            <a:pPr algn="ctr"/>
+            <a:r>
+              <a:rPr sz="1200" b="1" i="0">
+                <a:solidFill>
+                  <a:srgbClr val="006E96"/>
+                </a:solidFill>
+                <a:latin typeface="Arial"/>
+              </a:rPr>
+              <a:t>everything runs on</a:t>
+            </a:r>
+          </a:p>
+        </p:txBody>
+      </p:sp>
+      <p:cxnSp>
+        <p:nvCxnSpPr>
+          <p:cNvPr id="19" name="Connector 18"/>
+          <p:cNvCxnSpPr/>
+          <p:nvPr/>
+        </p:nvCxnSpPr>
+        <p:spPr>
+          <a:xfrm>
+            <a:off x="2487168" y="3520440"/>
+            <a:ext cx="758952" cy="0"/>
+          </a:xfrm>
+          <a:prstGeom prst="line">
+            <a:avLst/>
+          </a:prstGeom>
+          <a:ln w="19050">
+            <a:solidFill>
+              <a:srgbClr val="006E96"/>
+            </a:solidFill>
+            <a:tailEnd type="triangle" w="med" len="med"/>
+          </a:ln>
+        </p:spPr>
+        <p:style>
+          <a:lnRef idx="2">
+            <a:schemeClr val="accent1"/>
+          </a:lnRef>
+          <a:fillRef idx="0">
+            <a:schemeClr val="accent1"/>
+          </a:fillRef>
+          <a:effectRef idx="1">
+            <a:schemeClr val="accent1"/>
+          </a:effectRef>
+          <a:fontRef idx="minor">
+            <a:schemeClr val="tx1"/>
+          </a:fontRef>
+        </p:style>
+      </p:cxnSp>
+      <p:sp>
+        <p:nvSpPr>
+          <p:cNvPr id="20" name="Rectangle 19"/>
+          <p:cNvSpPr/>
+          <p:nvPr/>
+        </p:nvSpPr>
+        <p:spPr>
+          <a:xfrm>
+            <a:off x="2505456" y="3136392"/>
+            <a:ext cx="731520" cy="329184"/>
+          </a:xfrm>
+          <a:prstGeom prst="rect">
+            <a:avLst/>
+          </a:prstGeom>
+          <a:solidFill>
+            <a:srgbClr val="FFFFFF"/>
+          </a:solidFill>
+          <a:ln>
+            <a:noFill/>
+          </a:ln>
+          <a:effectLst/>
+        </p:spPr>
+        <p:style>
+          <a:lnRef idx="1">
+            <a:schemeClr val="accent1"/>
+          </a:lnRef>
+          <a:fillRef idx="3">
+            <a:schemeClr val="accent1"/>
+          </a:fillRef>
+          <a:effectRef idx="2">
+            <a:schemeClr val="accent1"/>
+          </a:effectRef>
+          <a:fontRef idx="minor">
+            <a:schemeClr val="lt1"/>
+          </a:fontRef>
+        </p:style>
+        <p:txBody>
+          <a:bodyPr rtlCol="0" anchor="ctr" lIns="36576" rIns="36576" tIns="0" bIns="0" wrap="square"/>
+          <a:lstStyle/>
+          <a:p>
+            <a:pPr algn="ctr"/>
+            <a:r>
+              <a:rPr sz="1200" b="1" i="0">
+                <a:solidFill>
+                  <a:srgbClr val="006E96"/>
+                </a:solidFill>
+                <a:latin typeface="Arial"/>
+              </a:rPr>
+              <a:t>owns</a:t>
+            </a:r>
+          </a:p>
+        </p:txBody>
+      </p:sp>
+      <p:sp>
+        <p:nvSpPr>
+          <p:cNvPr id="21" name="TextBox 20"/>
           <p:cNvSpPr txBox="1"/>
           <p:nvPr/>
         </p:nvSpPr>
         <p:spPr>
           <a:xfrm>
-            <a:off x="658368" y="5715000"/>
+            <a:off x="658368" y="5760720"/>
             <a:ext cx="10881360" cy="548640"/>
           </a:xfrm>
           <a:prstGeom prst="rect">
@@ -14926,14 +13827,14 @@
                 </a:solidFill>
                 <a:latin typeface="Arial"/>
               </a:rPr>
-              <a:t>Same few entities — both sides understand them. That is a policy goal translated into an architecture.</a:t>
-            </a:r>
-          </a:p>
-        </p:txBody>
-      </p:sp>
-      <p:sp>
-        <p:nvSpPr>
-          <p:cNvPr id="9" name="TextBox 8"/>
+              <a:t>These relationships are fixed. You do not invent them per ministry.</a:t>
+            </a:r>
+          </a:p>
+        </p:txBody>
+      </p:sp>
+      <p:sp>
+        <p:nvSpPr>
+          <p:cNvPr id="22" name="TextBox 21"/>
           <p:cNvSpPr txBox="1"/>
           <p:nvPr/>
         </p:nvSpPr>
@@ -15056,24 +13957,81 @@
                 </a:solidFill>
                 <a:latin typeface="Arial"/>
               </a:rPr>
-              <a:t>You adopt the metamodel — you don't design it</a:t>
-            </a:r>
-          </a:p>
-        </p:txBody>
-      </p:sp>
-      <p:sp>
-        <p:nvSpPr>
-          <p:cNvPr id="4" name="Oval 3"/>
+              <a:t>Re-use is not a matter of good intentions</a:t>
+            </a:r>
+          </a:p>
+        </p:txBody>
+      </p:sp>
+      <p:sp>
+        <p:nvSpPr>
+          <p:cNvPr id="4" name="TextBox 3"/>
+          <p:cNvSpPr txBox="1"/>
+          <p:nvPr/>
+        </p:nvSpPr>
+        <p:spPr>
+          <a:xfrm>
+            <a:off x="658368" y="1600200"/>
+            <a:ext cx="10881360" cy="2651760"/>
+          </a:xfrm>
+          <a:prstGeom prst="rect">
+            <a:avLst/>
+          </a:prstGeom>
+          <a:noFill/>
+        </p:spPr>
+        <p:txBody>
+          <a:bodyPr wrap="square">
+            <a:spAutoFit/>
+          </a:bodyPr>
+          <a:lstStyle/>
+          <a:p>
+            <a:pPr>
+              <a:spcAft>
+                <a:spcPts val="1200"/>
+              </a:spcAft>
+            </a:pPr>
+            <a:r>
+              <a:rPr sz="2000" b="0" i="0">
+                <a:solidFill>
+                  <a:srgbClr val="1A1A1A"/>
+                </a:solidFill>
+                <a:latin typeface="Arial"/>
+              </a:rPr>
+              <a:t>Everyone says they want re-use — one identity system used by many ministries, instead of five. But before the agriculture ministry can consume the identity authority's building block, both must describe that building block the same way: same entity type, same relationships, same data domain.</a:t>
+            </a:r>
+          </a:p>
+          <a:p>
+            <a:pPr>
+              <a:spcAft>
+                <a:spcPts val="1200"/>
+              </a:spcAft>
+            </a:pPr>
+            <a:r>
+              <a:rPr sz="2000" b="0" i="0">
+                <a:solidFill>
+                  <a:srgbClr val="1A1A1A"/>
+                </a:solidFill>
+                <a:latin typeface="Arial"/>
+              </a:rPr>
+              <a:t>If each ministry models in its own private language, re-use is impossible even when everyone wants it.</a:t>
+            </a:r>
+          </a:p>
+        </p:txBody>
+      </p:sp>
+      <p:sp>
+        <p:nvSpPr>
+          <p:cNvPr id="5" name="Rounded Rectangle 4"/>
           <p:cNvSpPr/>
           <p:nvPr/>
         </p:nvSpPr>
         <p:spPr>
           <a:xfrm>
-            <a:off x="621792" y="1463040"/>
-            <a:ext cx="310896" cy="310896"/>
-          </a:xfrm>
-          <a:prstGeom prst="ellipse">
-            <a:avLst/>
+            <a:off x="658368" y="4434840"/>
+            <a:ext cx="10881360" cy="1325880"/>
+          </a:xfrm>
+          <a:prstGeom prst="roundRect">
+            <a:avLst>
+              <a:gd name="adj" fmla="val 4500"/>
+            </a:avLst>
           </a:prstGeom>
           <a:solidFill>
             <a:srgbClr val="009CD6"/>
@@ -15098,368 +14056,55 @@
           </a:fontRef>
         </p:style>
         <p:txBody>
-          <a:bodyPr rtlCol="0" anchor="ctr" lIns="0" rIns="0" tIns="0" bIns="0" wrap="square"/>
+          <a:bodyPr rtlCol="0" anchor="ctr"/>
           <a:lstStyle/>
           <a:p>
             <a:pPr algn="ctr"/>
-            <a:r>
-              <a:rPr sz="1300" b="1" i="0">
+          </a:p>
+        </p:txBody>
+      </p:sp>
+      <p:sp>
+        <p:nvSpPr>
+          <p:cNvPr id="6" name="TextBox 5"/>
+          <p:cNvSpPr txBox="1"/>
+          <p:nvPr/>
+        </p:nvSpPr>
+        <p:spPr>
+          <a:xfrm>
+            <a:off x="859536" y="4626864"/>
+            <a:ext cx="10479024" cy="1051560"/>
+          </a:xfrm>
+          <a:prstGeom prst="rect">
+            <a:avLst/>
+          </a:prstGeom>
+          <a:noFill/>
+        </p:spPr>
+        <p:txBody>
+          <a:bodyPr wrap="square">
+            <a:spAutoFit/>
+          </a:bodyPr>
+          <a:lstStyle/>
+          <a:p>
+            <a:pPr>
+              <a:spcAft>
+                <a:spcPts val="700"/>
+              </a:spcAft>
+            </a:pPr>
+            <a:r>
+              <a:rPr sz="2300" b="1" i="0">
                 <a:solidFill>
                   <a:srgbClr val="FFFFFF"/>
                 </a:solidFill>
                 <a:latin typeface="Arial"/>
               </a:rPr>
-              <a:t>1</a:t>
-            </a:r>
-          </a:p>
-        </p:txBody>
-      </p:sp>
-      <p:sp>
-        <p:nvSpPr>
-          <p:cNvPr id="5" name="TextBox 4"/>
-          <p:cNvSpPr txBox="1"/>
-          <p:nvPr/>
-        </p:nvSpPr>
-        <p:spPr>
-          <a:xfrm>
-            <a:off x="1115568" y="1417320"/>
-            <a:ext cx="10527487" cy="1569720"/>
-          </a:xfrm>
-          <a:prstGeom prst="rect">
-            <a:avLst/>
-          </a:prstGeom>
-          <a:noFill/>
-        </p:spPr>
-        <p:txBody>
-          <a:bodyPr wrap="square">
-            <a:spAutoFit/>
-          </a:bodyPr>
-          <a:lstStyle/>
-          <a:p>
-            <a:pPr>
-              <a:spcAft>
-                <a:spcPts val="300"/>
-              </a:spcAft>
-            </a:pPr>
-            <a:r>
-              <a:rPr sz="1900" b="1" i="0">
-                <a:solidFill>
-                  <a:srgbClr val="1A1A1A"/>
-                </a:solidFill>
-                <a:latin typeface="Arial"/>
-              </a:rPr>
-              <a:t>PAERA Annex 2 publishes it</a:t>
-            </a:r>
-          </a:p>
-          <a:p>
-            <a:pPr>
-              <a:spcAft>
-                <a:spcPts val="300"/>
-              </a:spcAft>
-            </a:pPr>
-            <a:r>
-              <a:rPr sz="1550" b="0" i="0">
-                <a:solidFill>
-                  <a:srgbClr val="595959"/>
-                </a:solidFill>
-                <a:latin typeface="Arial"/>
-              </a:rPr>
-              <a:t>The entities, the definitions, the relationships — already worked out across many countries.</a:t>
-            </a:r>
-          </a:p>
-        </p:txBody>
-      </p:sp>
-      <p:sp>
-        <p:nvSpPr>
-          <p:cNvPr id="6" name="Rectangle 5"/>
-          <p:cNvSpPr/>
-          <p:nvPr/>
-        </p:nvSpPr>
-        <p:spPr>
-          <a:xfrm>
-            <a:off x="621792" y="2991612"/>
-            <a:ext cx="10881360" cy="12700"/>
-          </a:xfrm>
-          <a:prstGeom prst="rect">
-            <a:avLst/>
-          </a:prstGeom>
-          <a:solidFill>
-            <a:srgbClr val="DDECF4"/>
-          </a:solidFill>
-          <a:ln>
-            <a:noFill/>
-          </a:ln>
-          <a:effectLst/>
-        </p:spPr>
-        <p:style>
-          <a:lnRef idx="1">
-            <a:schemeClr val="accent1"/>
-          </a:lnRef>
-          <a:fillRef idx="3">
-            <a:schemeClr val="accent1"/>
-          </a:fillRef>
-          <a:effectRef idx="2">
-            <a:schemeClr val="accent1"/>
-          </a:effectRef>
-          <a:fontRef idx="minor">
-            <a:schemeClr val="lt1"/>
-          </a:fontRef>
-        </p:style>
-        <p:txBody>
-          <a:bodyPr rtlCol="0" anchor="ctr"/>
-          <a:lstStyle/>
-          <a:p>
-            <a:pPr algn="ctr"/>
-          </a:p>
-        </p:txBody>
-      </p:sp>
-      <p:sp>
-        <p:nvSpPr>
-          <p:cNvPr id="7" name="Oval 6"/>
-          <p:cNvSpPr/>
-          <p:nvPr/>
-        </p:nvSpPr>
-        <p:spPr>
-          <a:xfrm>
-            <a:off x="621792" y="3078479"/>
-            <a:ext cx="310896" cy="310896"/>
-          </a:xfrm>
-          <a:prstGeom prst="ellipse">
-            <a:avLst/>
-          </a:prstGeom>
-          <a:solidFill>
-            <a:srgbClr val="009CD6"/>
-          </a:solidFill>
-          <a:ln>
-            <a:noFill/>
-          </a:ln>
-          <a:effectLst/>
-        </p:spPr>
-        <p:style>
-          <a:lnRef idx="1">
-            <a:schemeClr val="accent1"/>
-          </a:lnRef>
-          <a:fillRef idx="3">
-            <a:schemeClr val="accent1"/>
-          </a:fillRef>
-          <a:effectRef idx="2">
-            <a:schemeClr val="accent1"/>
-          </a:effectRef>
-          <a:fontRef idx="minor">
-            <a:schemeClr val="lt1"/>
-          </a:fontRef>
-        </p:style>
-        <p:txBody>
-          <a:bodyPr rtlCol="0" anchor="ctr" lIns="0" rIns="0" tIns="0" bIns="0" wrap="square"/>
-          <a:lstStyle/>
-          <a:p>
-            <a:pPr algn="ctr"/>
-            <a:r>
-              <a:rPr sz="1300" b="1" i="0">
-                <a:solidFill>
-                  <a:srgbClr val="FFFFFF"/>
-                </a:solidFill>
-                <a:latin typeface="Arial"/>
-              </a:rPr>
-              <a:t>2</a:t>
-            </a:r>
-          </a:p>
-        </p:txBody>
-      </p:sp>
-      <p:sp>
-        <p:nvSpPr>
-          <p:cNvPr id="8" name="TextBox 7"/>
-          <p:cNvSpPr txBox="1"/>
-          <p:nvPr/>
-        </p:nvSpPr>
-        <p:spPr>
-          <a:xfrm>
-            <a:off x="1115568" y="3032760"/>
-            <a:ext cx="10527487" cy="1569720"/>
-          </a:xfrm>
-          <a:prstGeom prst="rect">
-            <a:avLst/>
-          </a:prstGeom>
-          <a:noFill/>
-        </p:spPr>
-        <p:txBody>
-          <a:bodyPr wrap="square">
-            <a:spAutoFit/>
-          </a:bodyPr>
-          <a:lstStyle/>
-          <a:p>
-            <a:pPr>
-              <a:spcAft>
-                <a:spcPts val="300"/>
-              </a:spcAft>
-            </a:pPr>
-            <a:r>
-              <a:rPr sz="1900" b="1" i="0">
-                <a:solidFill>
-                  <a:srgbClr val="1A1A1A"/>
-                </a:solidFill>
-                <a:latin typeface="Arial"/>
-              </a:rPr>
-              <a:t>Use it from day one</a:t>
-            </a:r>
-          </a:p>
-        </p:txBody>
-      </p:sp>
-      <p:sp>
-        <p:nvSpPr>
-          <p:cNvPr id="9" name="Rectangle 8"/>
-          <p:cNvSpPr/>
-          <p:nvPr/>
-        </p:nvSpPr>
-        <p:spPr>
-          <a:xfrm>
-            <a:off x="621792" y="4607052"/>
-            <a:ext cx="10881360" cy="12700"/>
-          </a:xfrm>
-          <a:prstGeom prst="rect">
-            <a:avLst/>
-          </a:prstGeom>
-          <a:solidFill>
-            <a:srgbClr val="DDECF4"/>
-          </a:solidFill>
-          <a:ln>
-            <a:noFill/>
-          </a:ln>
-          <a:effectLst/>
-        </p:spPr>
-        <p:style>
-          <a:lnRef idx="1">
-            <a:schemeClr val="accent1"/>
-          </a:lnRef>
-          <a:fillRef idx="3">
-            <a:schemeClr val="accent1"/>
-          </a:fillRef>
-          <a:effectRef idx="2">
-            <a:schemeClr val="accent1"/>
-          </a:effectRef>
-          <a:fontRef idx="minor">
-            <a:schemeClr val="lt1"/>
-          </a:fontRef>
-        </p:style>
-        <p:txBody>
-          <a:bodyPr rtlCol="0" anchor="ctr"/>
-          <a:lstStyle/>
-          <a:p>
-            <a:pPr algn="ctr"/>
-          </a:p>
-        </p:txBody>
-      </p:sp>
-      <p:sp>
-        <p:nvSpPr>
-          <p:cNvPr id="10" name="Oval 9"/>
-          <p:cNvSpPr/>
-          <p:nvPr/>
-        </p:nvSpPr>
-        <p:spPr>
-          <a:xfrm>
-            <a:off x="621792" y="4693920"/>
-            <a:ext cx="310896" cy="310896"/>
-          </a:xfrm>
-          <a:prstGeom prst="ellipse">
-            <a:avLst/>
-          </a:prstGeom>
-          <a:solidFill>
-            <a:srgbClr val="009CD6"/>
-          </a:solidFill>
-          <a:ln>
-            <a:noFill/>
-          </a:ln>
-          <a:effectLst/>
-        </p:spPr>
-        <p:style>
-          <a:lnRef idx="1">
-            <a:schemeClr val="accent1"/>
-          </a:lnRef>
-          <a:fillRef idx="3">
-            <a:schemeClr val="accent1"/>
-          </a:fillRef>
-          <a:effectRef idx="2">
-            <a:schemeClr val="accent1"/>
-          </a:effectRef>
-          <a:fontRef idx="minor">
-            <a:schemeClr val="lt1"/>
-          </a:fontRef>
-        </p:style>
-        <p:txBody>
-          <a:bodyPr rtlCol="0" anchor="ctr" lIns="0" rIns="0" tIns="0" bIns="0" wrap="square"/>
-          <a:lstStyle/>
-          <a:p>
-            <a:pPr algn="ctr"/>
-            <a:r>
-              <a:rPr sz="1300" b="1" i="0">
-                <a:solidFill>
-                  <a:srgbClr val="FFFFFF"/>
-                </a:solidFill>
-                <a:latin typeface="Arial"/>
-              </a:rPr>
-              <a:t>3</a:t>
-            </a:r>
-          </a:p>
-        </p:txBody>
-      </p:sp>
-      <p:sp>
-        <p:nvSpPr>
-          <p:cNvPr id="11" name="TextBox 10"/>
-          <p:cNvSpPr txBox="1"/>
-          <p:nvPr/>
-        </p:nvSpPr>
-        <p:spPr>
-          <a:xfrm>
-            <a:off x="1115568" y="4648200"/>
-            <a:ext cx="10527487" cy="1569720"/>
-          </a:xfrm>
-          <a:prstGeom prst="rect">
-            <a:avLst/>
-          </a:prstGeom>
-          <a:noFill/>
-        </p:spPr>
-        <p:txBody>
-          <a:bodyPr wrap="square">
-            <a:spAutoFit/>
-          </a:bodyPr>
-          <a:lstStyle/>
-          <a:p>
-            <a:pPr>
-              <a:spcAft>
-                <a:spcPts val="300"/>
-              </a:spcAft>
-            </a:pPr>
-            <a:r>
-              <a:rPr sz="1900" b="1" i="0">
-                <a:solidFill>
-                  <a:srgbClr val="1A1A1A"/>
-                </a:solidFill>
-                <a:latin typeface="Arial"/>
-              </a:rPr>
-              <a:t>Extend it only where your country genuinely needs a new entity</a:t>
-            </a:r>
-          </a:p>
-          <a:p>
-            <a:pPr>
-              <a:spcAft>
-                <a:spcPts val="300"/>
-              </a:spcAft>
-            </a:pPr>
-            <a:r>
-              <a:rPr sz="1550" b="0" i="0">
-                <a:solidFill>
-                  <a:srgbClr val="595959"/>
-                </a:solidFill>
-                <a:latin typeface="Arial"/>
-              </a:rPr>
-              <a:t>Deliberately, written down, shared.</a:t>
-            </a:r>
-          </a:p>
-        </p:txBody>
-      </p:sp>
-      <p:sp>
-        <p:nvSpPr>
-          <p:cNvPr id="12" name="TextBox 11"/>
+              <a:t>The metamodel is the precondition for re-use.</a:t>
+            </a:r>
+          </a:p>
+        </p:txBody>
+      </p:sp>
+      <p:sp>
+        <p:nvSpPr>
+          <p:cNvPr id="7" name="TextBox 6"/>
           <p:cNvSpPr txBox="1"/>
           <p:nvPr/>
         </p:nvSpPr>
@@ -15511,6 +14156,930 @@
       <p:grpSpPr/>
       <p:sp>
         <p:nvSpPr>
+          <p:cNvPr id="2" name="Rectangle 1"/>
+          <p:cNvSpPr/>
+          <p:nvPr/>
+        </p:nvSpPr>
+        <p:spPr>
+          <a:xfrm>
+            <a:off x="457200" y="384048"/>
+            <a:ext cx="45720" cy="256032"/>
+          </a:xfrm>
+          <a:prstGeom prst="rect">
+            <a:avLst/>
+          </a:prstGeom>
+          <a:solidFill>
+            <a:srgbClr val="009CD6"/>
+          </a:solidFill>
+          <a:ln>
+            <a:noFill/>
+          </a:ln>
+          <a:effectLst/>
+        </p:spPr>
+        <p:style>
+          <a:lnRef idx="1">
+            <a:schemeClr val="accent1"/>
+          </a:lnRef>
+          <a:fillRef idx="3">
+            <a:schemeClr val="accent1"/>
+          </a:fillRef>
+          <a:effectRef idx="2">
+            <a:schemeClr val="accent1"/>
+          </a:effectRef>
+          <a:fontRef idx="minor">
+            <a:schemeClr val="lt1"/>
+          </a:fontRef>
+        </p:style>
+        <p:txBody>
+          <a:bodyPr rtlCol="0" anchor="ctr"/>
+          <a:lstStyle/>
+          <a:p>
+            <a:pPr algn="ctr"/>
+          </a:p>
+        </p:txBody>
+      </p:sp>
+      <p:sp>
+        <p:nvSpPr>
+          <p:cNvPr id="3" name="TextBox 2"/>
+          <p:cNvSpPr txBox="1"/>
+          <p:nvPr/>
+        </p:nvSpPr>
+        <p:spPr>
+          <a:xfrm>
+            <a:off x="621792" y="274320"/>
+            <a:ext cx="11247120" cy="914400"/>
+          </a:xfrm>
+          <a:prstGeom prst="rect">
+            <a:avLst/>
+          </a:prstGeom>
+          <a:noFill/>
+        </p:spPr>
+        <p:txBody>
+          <a:bodyPr wrap="square">
+            <a:spAutoFit/>
+          </a:bodyPr>
+          <a:lstStyle/>
+          <a:p>
+            <a:r>
+              <a:rPr sz="2800" b="1" i="0">
+                <a:solidFill>
+                  <a:srgbClr val="1A1A1A"/>
+                </a:solidFill>
+                <a:latin typeface="Arial"/>
+              </a:rPr>
+              <a:t>The same few entities let business and IT understand each other</a:t>
+            </a:r>
+          </a:p>
+        </p:txBody>
+      </p:sp>
+      <p:sp>
+        <p:nvSpPr>
+          <p:cNvPr id="4" name="Rounded Rectangle 3"/>
+          <p:cNvSpPr/>
+          <p:nvPr/>
+        </p:nvSpPr>
+        <p:spPr>
+          <a:xfrm>
+            <a:off x="658368" y="1554480"/>
+            <a:ext cx="5394960" cy="3977639"/>
+          </a:xfrm>
+          <a:prstGeom prst="roundRect">
+            <a:avLst>
+              <a:gd name="adj" fmla="val 4500"/>
+            </a:avLst>
+          </a:prstGeom>
+          <a:solidFill>
+            <a:srgbClr val="E5F5FB"/>
+          </a:solidFill>
+          <a:ln>
+            <a:noFill/>
+          </a:ln>
+          <a:effectLst/>
+        </p:spPr>
+        <p:style>
+          <a:lnRef idx="1">
+            <a:schemeClr val="accent1"/>
+          </a:lnRef>
+          <a:fillRef idx="3">
+            <a:schemeClr val="accent1"/>
+          </a:fillRef>
+          <a:effectRef idx="2">
+            <a:schemeClr val="accent1"/>
+          </a:effectRef>
+          <a:fontRef idx="minor">
+            <a:schemeClr val="lt1"/>
+          </a:fontRef>
+        </p:style>
+        <p:txBody>
+          <a:bodyPr rtlCol="0" anchor="ctr"/>
+          <a:lstStyle/>
+          <a:p>
+            <a:pPr algn="ctr"/>
+          </a:p>
+        </p:txBody>
+      </p:sp>
+      <p:sp>
+        <p:nvSpPr>
+          <p:cNvPr id="5" name="TextBox 4"/>
+          <p:cNvSpPr txBox="1"/>
+          <p:nvPr/>
+        </p:nvSpPr>
+        <p:spPr>
+          <a:xfrm>
+            <a:off x="859536" y="1700784"/>
+            <a:ext cx="4992624" cy="3703320"/>
+          </a:xfrm>
+          <a:prstGeom prst="rect">
+            <a:avLst/>
+          </a:prstGeom>
+          <a:noFill/>
+        </p:spPr>
+        <p:txBody>
+          <a:bodyPr wrap="square">
+            <a:spAutoFit/>
+          </a:bodyPr>
+          <a:lstStyle/>
+          <a:p>
+            <a:pPr>
+              <a:spcAft>
+                <a:spcPts val="700"/>
+              </a:spcAft>
+            </a:pPr>
+            <a:r>
+              <a:rPr sz="1900" b="1" i="0">
+                <a:solidFill>
+                  <a:srgbClr val="006E96"/>
+                </a:solidFill>
+                <a:latin typeface="Arial"/>
+              </a:rPr>
+              <a:t>The head of policy says</a:t>
+            </a:r>
+          </a:p>
+          <a:p>
+            <a:pPr>
+              <a:spcAft>
+                <a:spcPts val="700"/>
+              </a:spcAft>
+            </a:pPr>
+            <a:r>
+              <a:rPr sz="1600" b="0" i="0">
+                <a:solidFill>
+                  <a:srgbClr val="1A1A1A"/>
+                </a:solidFill>
+                <a:latin typeface="Arial"/>
+              </a:rPr>
+              <a:t>“We want to register every learner once.”</a:t>
+            </a:r>
+          </a:p>
+        </p:txBody>
+      </p:sp>
+      <p:sp>
+        <p:nvSpPr>
+          <p:cNvPr id="6" name="Rounded Rectangle 5"/>
+          <p:cNvSpPr/>
+          <p:nvPr/>
+        </p:nvSpPr>
+        <p:spPr>
+          <a:xfrm>
+            <a:off x="6263640" y="1554480"/>
+            <a:ext cx="5394960" cy="3977639"/>
+          </a:xfrm>
+          <a:prstGeom prst="roundRect">
+            <a:avLst>
+              <a:gd name="adj" fmla="val 4500"/>
+            </a:avLst>
+          </a:prstGeom>
+          <a:solidFill>
+            <a:srgbClr val="F2F2F2"/>
+          </a:solidFill>
+          <a:ln>
+            <a:noFill/>
+          </a:ln>
+          <a:effectLst/>
+        </p:spPr>
+        <p:style>
+          <a:lnRef idx="1">
+            <a:schemeClr val="accent1"/>
+          </a:lnRef>
+          <a:fillRef idx="3">
+            <a:schemeClr val="accent1"/>
+          </a:fillRef>
+          <a:effectRef idx="2">
+            <a:schemeClr val="accent1"/>
+          </a:effectRef>
+          <a:fontRef idx="minor">
+            <a:schemeClr val="lt1"/>
+          </a:fontRef>
+        </p:style>
+        <p:txBody>
+          <a:bodyPr rtlCol="0" anchor="ctr"/>
+          <a:lstStyle/>
+          <a:p>
+            <a:pPr algn="ctr"/>
+          </a:p>
+        </p:txBody>
+      </p:sp>
+      <p:sp>
+        <p:nvSpPr>
+          <p:cNvPr id="7" name="TextBox 6"/>
+          <p:cNvSpPr txBox="1"/>
+          <p:nvPr/>
+        </p:nvSpPr>
+        <p:spPr>
+          <a:xfrm>
+            <a:off x="6464808" y="1700784"/>
+            <a:ext cx="4992624" cy="3703320"/>
+          </a:xfrm>
+          <a:prstGeom prst="rect">
+            <a:avLst/>
+          </a:prstGeom>
+          <a:noFill/>
+        </p:spPr>
+        <p:txBody>
+          <a:bodyPr wrap="square">
+            <a:spAutoFit/>
+          </a:bodyPr>
+          <a:lstStyle/>
+          <a:p>
+            <a:pPr>
+              <a:spcAft>
+                <a:spcPts val="700"/>
+              </a:spcAft>
+            </a:pPr>
+            <a:r>
+              <a:rPr sz="1900" b="1" i="0">
+                <a:solidFill>
+                  <a:srgbClr val="006E96"/>
+                </a:solidFill>
+                <a:latin typeface="Arial"/>
+              </a:rPr>
+              <a:t>The architect answers</a:t>
+            </a:r>
+          </a:p>
+          <a:p>
+            <a:pPr>
+              <a:spcAft>
+                <a:spcPts val="700"/>
+              </a:spcAft>
+            </a:pPr>
+            <a:r>
+              <a:rPr sz="1600" b="0" i="0">
+                <a:solidFill>
+                  <a:srgbClr val="1A1A1A"/>
+                </a:solidFill>
+                <a:latin typeface="Arial"/>
+              </a:rPr>
+              <a:t>“That is one Capability,</a:t>
+            </a:r>
+          </a:p>
+          <a:p>
+            <a:pPr>
+              <a:spcAft>
+                <a:spcPts val="700"/>
+              </a:spcAft>
+            </a:pPr>
+            <a:r>
+              <a:rPr sz="1600" b="0" i="0">
+                <a:solidFill>
+                  <a:srgbClr val="1A1A1A"/>
+                </a:solidFill>
+                <a:latin typeface="Arial"/>
+              </a:rPr>
+              <a:t>one Service,</a:t>
+            </a:r>
+          </a:p>
+          <a:p>
+            <a:pPr>
+              <a:spcAft>
+                <a:spcPts val="700"/>
+              </a:spcAft>
+            </a:pPr>
+            <a:r>
+              <a:rPr sz="1600" b="0" i="0">
+                <a:solidFill>
+                  <a:srgbClr val="1A1A1A"/>
+                </a:solidFill>
+                <a:latin typeface="Arial"/>
+              </a:rPr>
+              <a:t>and one Data Domain owned by the learner registry.”</a:t>
+            </a:r>
+          </a:p>
+        </p:txBody>
+      </p:sp>
+      <p:sp>
+        <p:nvSpPr>
+          <p:cNvPr id="8" name="TextBox 7"/>
+          <p:cNvSpPr txBox="1"/>
+          <p:nvPr/>
+        </p:nvSpPr>
+        <p:spPr>
+          <a:xfrm>
+            <a:off x="658368" y="5715000"/>
+            <a:ext cx="10881360" cy="548640"/>
+          </a:xfrm>
+          <a:prstGeom prst="rect">
+            <a:avLst/>
+          </a:prstGeom>
+          <a:noFill/>
+        </p:spPr>
+        <p:txBody>
+          <a:bodyPr wrap="square">
+            <a:spAutoFit/>
+          </a:bodyPr>
+          <a:lstStyle/>
+          <a:p>
+            <a:r>
+              <a:rPr sz="1550" b="1" i="0">
+                <a:solidFill>
+                  <a:srgbClr val="006E96"/>
+                </a:solidFill>
+                <a:latin typeface="Arial"/>
+              </a:rPr>
+              <a:t>Same few entities — both sides understand them. That is a policy goal translated into an architecture.</a:t>
+            </a:r>
+          </a:p>
+        </p:txBody>
+      </p:sp>
+      <p:sp>
+        <p:nvSpPr>
+          <p:cNvPr id="9" name="TextBox 8"/>
+          <p:cNvSpPr txBox="1"/>
+          <p:nvPr/>
+        </p:nvSpPr>
+        <p:spPr>
+          <a:xfrm>
+            <a:off x="457200" y="6473952"/>
+            <a:ext cx="7772400" cy="292608"/>
+          </a:xfrm>
+          <a:prstGeom prst="rect">
+            <a:avLst/>
+          </a:prstGeom>
+          <a:noFill/>
+        </p:spPr>
+        <p:txBody>
+          <a:bodyPr wrap="square">
+            <a:spAutoFit/>
+          </a:bodyPr>
+          <a:lstStyle/>
+          <a:p>
+            <a:r>
+              <a:rPr sz="900" b="0" i="0">
+                <a:solidFill>
+                  <a:srgbClr val="595959"/>
+                </a:solidFill>
+                <a:latin typeface="Arial"/>
+              </a:rPr>
+              <a:t>2.2 · The shared vocabulary that makes re-use possible</a:t>
+            </a:r>
+          </a:p>
+        </p:txBody>
+      </p:sp>
+    </p:spTree>
+  </p:cSld>
+  <p:clrMapOvr>
+    <a:masterClrMapping/>
+  </p:clrMapOvr>
+</p:sld>
+</file>
+
+<file path=ppt/slides/slide17.xml><?xml version="1.0" encoding="utf-8"?>
+<p:sld xmlns:a="http://schemas.openxmlformats.org/drawingml/2006/main" xmlns:p="http://schemas.openxmlformats.org/presentationml/2006/main" xmlns:r="http://schemas.openxmlformats.org/officeDocument/2006/relationships">
+  <p:cSld>
+    <p:spTree>
+      <p:nvGrpSpPr>
+        <p:cNvPr id="1" name=""/>
+        <p:cNvGrpSpPr/>
+        <p:nvPr/>
+      </p:nvGrpSpPr>
+      <p:grpSpPr/>
+      <p:sp>
+        <p:nvSpPr>
+          <p:cNvPr id="2" name="Rectangle 1"/>
+          <p:cNvSpPr/>
+          <p:nvPr/>
+        </p:nvSpPr>
+        <p:spPr>
+          <a:xfrm>
+            <a:off x="457200" y="384048"/>
+            <a:ext cx="45720" cy="256032"/>
+          </a:xfrm>
+          <a:prstGeom prst="rect">
+            <a:avLst/>
+          </a:prstGeom>
+          <a:solidFill>
+            <a:srgbClr val="009CD6"/>
+          </a:solidFill>
+          <a:ln>
+            <a:noFill/>
+          </a:ln>
+          <a:effectLst/>
+        </p:spPr>
+        <p:style>
+          <a:lnRef idx="1">
+            <a:schemeClr val="accent1"/>
+          </a:lnRef>
+          <a:fillRef idx="3">
+            <a:schemeClr val="accent1"/>
+          </a:fillRef>
+          <a:effectRef idx="2">
+            <a:schemeClr val="accent1"/>
+          </a:effectRef>
+          <a:fontRef idx="minor">
+            <a:schemeClr val="lt1"/>
+          </a:fontRef>
+        </p:style>
+        <p:txBody>
+          <a:bodyPr rtlCol="0" anchor="ctr"/>
+          <a:lstStyle/>
+          <a:p>
+            <a:pPr algn="ctr"/>
+          </a:p>
+        </p:txBody>
+      </p:sp>
+      <p:sp>
+        <p:nvSpPr>
+          <p:cNvPr id="3" name="TextBox 2"/>
+          <p:cNvSpPr txBox="1"/>
+          <p:nvPr/>
+        </p:nvSpPr>
+        <p:spPr>
+          <a:xfrm>
+            <a:off x="621792" y="274320"/>
+            <a:ext cx="11247120" cy="914400"/>
+          </a:xfrm>
+          <a:prstGeom prst="rect">
+            <a:avLst/>
+          </a:prstGeom>
+          <a:noFill/>
+        </p:spPr>
+        <p:txBody>
+          <a:bodyPr wrap="square">
+            <a:spAutoFit/>
+          </a:bodyPr>
+          <a:lstStyle/>
+          <a:p>
+            <a:r>
+              <a:rPr sz="2800" b="1" i="0">
+                <a:solidFill>
+                  <a:srgbClr val="1A1A1A"/>
+                </a:solidFill>
+                <a:latin typeface="Arial"/>
+              </a:rPr>
+              <a:t>You adopt the metamodel — you don't design it</a:t>
+            </a:r>
+          </a:p>
+        </p:txBody>
+      </p:sp>
+      <p:sp>
+        <p:nvSpPr>
+          <p:cNvPr id="4" name="Oval 3"/>
+          <p:cNvSpPr/>
+          <p:nvPr/>
+        </p:nvSpPr>
+        <p:spPr>
+          <a:xfrm>
+            <a:off x="621792" y="1463040"/>
+            <a:ext cx="310896" cy="310896"/>
+          </a:xfrm>
+          <a:prstGeom prst="ellipse">
+            <a:avLst/>
+          </a:prstGeom>
+          <a:solidFill>
+            <a:srgbClr val="009CD6"/>
+          </a:solidFill>
+          <a:ln>
+            <a:noFill/>
+          </a:ln>
+          <a:effectLst/>
+        </p:spPr>
+        <p:style>
+          <a:lnRef idx="1">
+            <a:schemeClr val="accent1"/>
+          </a:lnRef>
+          <a:fillRef idx="3">
+            <a:schemeClr val="accent1"/>
+          </a:fillRef>
+          <a:effectRef idx="2">
+            <a:schemeClr val="accent1"/>
+          </a:effectRef>
+          <a:fontRef idx="minor">
+            <a:schemeClr val="lt1"/>
+          </a:fontRef>
+        </p:style>
+        <p:txBody>
+          <a:bodyPr rtlCol="0" anchor="ctr" lIns="0" rIns="0" tIns="0" bIns="0" wrap="square"/>
+          <a:lstStyle/>
+          <a:p>
+            <a:pPr algn="ctr"/>
+            <a:r>
+              <a:rPr sz="1300" b="1" i="0">
+                <a:solidFill>
+                  <a:srgbClr val="FFFFFF"/>
+                </a:solidFill>
+                <a:latin typeface="Arial"/>
+              </a:rPr>
+              <a:t>1</a:t>
+            </a:r>
+          </a:p>
+        </p:txBody>
+      </p:sp>
+      <p:sp>
+        <p:nvSpPr>
+          <p:cNvPr id="5" name="TextBox 4"/>
+          <p:cNvSpPr txBox="1"/>
+          <p:nvPr/>
+        </p:nvSpPr>
+        <p:spPr>
+          <a:xfrm>
+            <a:off x="1115568" y="1417320"/>
+            <a:ext cx="10527487" cy="1569720"/>
+          </a:xfrm>
+          <a:prstGeom prst="rect">
+            <a:avLst/>
+          </a:prstGeom>
+          <a:noFill/>
+        </p:spPr>
+        <p:txBody>
+          <a:bodyPr wrap="square">
+            <a:spAutoFit/>
+          </a:bodyPr>
+          <a:lstStyle/>
+          <a:p>
+            <a:pPr>
+              <a:spcAft>
+                <a:spcPts val="300"/>
+              </a:spcAft>
+            </a:pPr>
+            <a:r>
+              <a:rPr sz="1900" b="1" i="0">
+                <a:solidFill>
+                  <a:srgbClr val="1A1A1A"/>
+                </a:solidFill>
+                <a:latin typeface="Arial"/>
+              </a:rPr>
+              <a:t>PAERA Annex 2 publishes it</a:t>
+            </a:r>
+          </a:p>
+          <a:p>
+            <a:pPr>
+              <a:spcAft>
+                <a:spcPts val="300"/>
+              </a:spcAft>
+            </a:pPr>
+            <a:r>
+              <a:rPr sz="1550" b="0" i="0">
+                <a:solidFill>
+                  <a:srgbClr val="595959"/>
+                </a:solidFill>
+                <a:latin typeface="Arial"/>
+              </a:rPr>
+              <a:t>The entities, the definitions, the relationships — already worked out across many countries.</a:t>
+            </a:r>
+          </a:p>
+        </p:txBody>
+      </p:sp>
+      <p:sp>
+        <p:nvSpPr>
+          <p:cNvPr id="6" name="Rectangle 5"/>
+          <p:cNvSpPr/>
+          <p:nvPr/>
+        </p:nvSpPr>
+        <p:spPr>
+          <a:xfrm>
+            <a:off x="621792" y="2991612"/>
+            <a:ext cx="10881360" cy="12700"/>
+          </a:xfrm>
+          <a:prstGeom prst="rect">
+            <a:avLst/>
+          </a:prstGeom>
+          <a:solidFill>
+            <a:srgbClr val="DDECF4"/>
+          </a:solidFill>
+          <a:ln>
+            <a:noFill/>
+          </a:ln>
+          <a:effectLst/>
+        </p:spPr>
+        <p:style>
+          <a:lnRef idx="1">
+            <a:schemeClr val="accent1"/>
+          </a:lnRef>
+          <a:fillRef idx="3">
+            <a:schemeClr val="accent1"/>
+          </a:fillRef>
+          <a:effectRef idx="2">
+            <a:schemeClr val="accent1"/>
+          </a:effectRef>
+          <a:fontRef idx="minor">
+            <a:schemeClr val="lt1"/>
+          </a:fontRef>
+        </p:style>
+        <p:txBody>
+          <a:bodyPr rtlCol="0" anchor="ctr"/>
+          <a:lstStyle/>
+          <a:p>
+            <a:pPr algn="ctr"/>
+          </a:p>
+        </p:txBody>
+      </p:sp>
+      <p:sp>
+        <p:nvSpPr>
+          <p:cNvPr id="7" name="Oval 6"/>
+          <p:cNvSpPr/>
+          <p:nvPr/>
+        </p:nvSpPr>
+        <p:spPr>
+          <a:xfrm>
+            <a:off x="621792" y="3078479"/>
+            <a:ext cx="310896" cy="310896"/>
+          </a:xfrm>
+          <a:prstGeom prst="ellipse">
+            <a:avLst/>
+          </a:prstGeom>
+          <a:solidFill>
+            <a:srgbClr val="009CD6"/>
+          </a:solidFill>
+          <a:ln>
+            <a:noFill/>
+          </a:ln>
+          <a:effectLst/>
+        </p:spPr>
+        <p:style>
+          <a:lnRef idx="1">
+            <a:schemeClr val="accent1"/>
+          </a:lnRef>
+          <a:fillRef idx="3">
+            <a:schemeClr val="accent1"/>
+          </a:fillRef>
+          <a:effectRef idx="2">
+            <a:schemeClr val="accent1"/>
+          </a:effectRef>
+          <a:fontRef idx="minor">
+            <a:schemeClr val="lt1"/>
+          </a:fontRef>
+        </p:style>
+        <p:txBody>
+          <a:bodyPr rtlCol="0" anchor="ctr" lIns="0" rIns="0" tIns="0" bIns="0" wrap="square"/>
+          <a:lstStyle/>
+          <a:p>
+            <a:pPr algn="ctr"/>
+            <a:r>
+              <a:rPr sz="1300" b="1" i="0">
+                <a:solidFill>
+                  <a:srgbClr val="FFFFFF"/>
+                </a:solidFill>
+                <a:latin typeface="Arial"/>
+              </a:rPr>
+              <a:t>2</a:t>
+            </a:r>
+          </a:p>
+        </p:txBody>
+      </p:sp>
+      <p:sp>
+        <p:nvSpPr>
+          <p:cNvPr id="8" name="TextBox 7"/>
+          <p:cNvSpPr txBox="1"/>
+          <p:nvPr/>
+        </p:nvSpPr>
+        <p:spPr>
+          <a:xfrm>
+            <a:off x="1115568" y="3032760"/>
+            <a:ext cx="10527487" cy="1569720"/>
+          </a:xfrm>
+          <a:prstGeom prst="rect">
+            <a:avLst/>
+          </a:prstGeom>
+          <a:noFill/>
+        </p:spPr>
+        <p:txBody>
+          <a:bodyPr wrap="square">
+            <a:spAutoFit/>
+          </a:bodyPr>
+          <a:lstStyle/>
+          <a:p>
+            <a:pPr>
+              <a:spcAft>
+                <a:spcPts val="300"/>
+              </a:spcAft>
+            </a:pPr>
+            <a:r>
+              <a:rPr sz="1900" b="1" i="0">
+                <a:solidFill>
+                  <a:srgbClr val="1A1A1A"/>
+                </a:solidFill>
+                <a:latin typeface="Arial"/>
+              </a:rPr>
+              <a:t>Use it from day one</a:t>
+            </a:r>
+          </a:p>
+        </p:txBody>
+      </p:sp>
+      <p:sp>
+        <p:nvSpPr>
+          <p:cNvPr id="9" name="Rectangle 8"/>
+          <p:cNvSpPr/>
+          <p:nvPr/>
+        </p:nvSpPr>
+        <p:spPr>
+          <a:xfrm>
+            <a:off x="621792" y="4607052"/>
+            <a:ext cx="10881360" cy="12700"/>
+          </a:xfrm>
+          <a:prstGeom prst="rect">
+            <a:avLst/>
+          </a:prstGeom>
+          <a:solidFill>
+            <a:srgbClr val="DDECF4"/>
+          </a:solidFill>
+          <a:ln>
+            <a:noFill/>
+          </a:ln>
+          <a:effectLst/>
+        </p:spPr>
+        <p:style>
+          <a:lnRef idx="1">
+            <a:schemeClr val="accent1"/>
+          </a:lnRef>
+          <a:fillRef idx="3">
+            <a:schemeClr val="accent1"/>
+          </a:fillRef>
+          <a:effectRef idx="2">
+            <a:schemeClr val="accent1"/>
+          </a:effectRef>
+          <a:fontRef idx="minor">
+            <a:schemeClr val="lt1"/>
+          </a:fontRef>
+        </p:style>
+        <p:txBody>
+          <a:bodyPr rtlCol="0" anchor="ctr"/>
+          <a:lstStyle/>
+          <a:p>
+            <a:pPr algn="ctr"/>
+          </a:p>
+        </p:txBody>
+      </p:sp>
+      <p:sp>
+        <p:nvSpPr>
+          <p:cNvPr id="10" name="Oval 9"/>
+          <p:cNvSpPr/>
+          <p:nvPr/>
+        </p:nvSpPr>
+        <p:spPr>
+          <a:xfrm>
+            <a:off x="621792" y="4693920"/>
+            <a:ext cx="310896" cy="310896"/>
+          </a:xfrm>
+          <a:prstGeom prst="ellipse">
+            <a:avLst/>
+          </a:prstGeom>
+          <a:solidFill>
+            <a:srgbClr val="009CD6"/>
+          </a:solidFill>
+          <a:ln>
+            <a:noFill/>
+          </a:ln>
+          <a:effectLst/>
+        </p:spPr>
+        <p:style>
+          <a:lnRef idx="1">
+            <a:schemeClr val="accent1"/>
+          </a:lnRef>
+          <a:fillRef idx="3">
+            <a:schemeClr val="accent1"/>
+          </a:fillRef>
+          <a:effectRef idx="2">
+            <a:schemeClr val="accent1"/>
+          </a:effectRef>
+          <a:fontRef idx="minor">
+            <a:schemeClr val="lt1"/>
+          </a:fontRef>
+        </p:style>
+        <p:txBody>
+          <a:bodyPr rtlCol="0" anchor="ctr" lIns="0" rIns="0" tIns="0" bIns="0" wrap="square"/>
+          <a:lstStyle/>
+          <a:p>
+            <a:pPr algn="ctr"/>
+            <a:r>
+              <a:rPr sz="1300" b="1" i="0">
+                <a:solidFill>
+                  <a:srgbClr val="FFFFFF"/>
+                </a:solidFill>
+                <a:latin typeface="Arial"/>
+              </a:rPr>
+              <a:t>3</a:t>
+            </a:r>
+          </a:p>
+        </p:txBody>
+      </p:sp>
+      <p:sp>
+        <p:nvSpPr>
+          <p:cNvPr id="11" name="TextBox 10"/>
+          <p:cNvSpPr txBox="1"/>
+          <p:nvPr/>
+        </p:nvSpPr>
+        <p:spPr>
+          <a:xfrm>
+            <a:off x="1115568" y="4648200"/>
+            <a:ext cx="10527487" cy="1569720"/>
+          </a:xfrm>
+          <a:prstGeom prst="rect">
+            <a:avLst/>
+          </a:prstGeom>
+          <a:noFill/>
+        </p:spPr>
+        <p:txBody>
+          <a:bodyPr wrap="square">
+            <a:spAutoFit/>
+          </a:bodyPr>
+          <a:lstStyle/>
+          <a:p>
+            <a:pPr>
+              <a:spcAft>
+                <a:spcPts val="300"/>
+              </a:spcAft>
+            </a:pPr>
+            <a:r>
+              <a:rPr sz="1900" b="1" i="0">
+                <a:solidFill>
+                  <a:srgbClr val="1A1A1A"/>
+                </a:solidFill>
+                <a:latin typeface="Arial"/>
+              </a:rPr>
+              <a:t>Extend it only where your country genuinely needs a new entity</a:t>
+            </a:r>
+          </a:p>
+          <a:p>
+            <a:pPr>
+              <a:spcAft>
+                <a:spcPts val="300"/>
+              </a:spcAft>
+            </a:pPr>
+            <a:r>
+              <a:rPr sz="1550" b="0" i="0">
+                <a:solidFill>
+                  <a:srgbClr val="595959"/>
+                </a:solidFill>
+                <a:latin typeface="Arial"/>
+              </a:rPr>
+              <a:t>Deliberately, written down, shared.</a:t>
+            </a:r>
+          </a:p>
+        </p:txBody>
+      </p:sp>
+      <p:sp>
+        <p:nvSpPr>
+          <p:cNvPr id="12" name="TextBox 11"/>
+          <p:cNvSpPr txBox="1"/>
+          <p:nvPr/>
+        </p:nvSpPr>
+        <p:spPr>
+          <a:xfrm>
+            <a:off x="457200" y="6473952"/>
+            <a:ext cx="7772400" cy="292608"/>
+          </a:xfrm>
+          <a:prstGeom prst="rect">
+            <a:avLst/>
+          </a:prstGeom>
+          <a:noFill/>
+        </p:spPr>
+        <p:txBody>
+          <a:bodyPr wrap="square">
+            <a:spAutoFit/>
+          </a:bodyPr>
+          <a:lstStyle/>
+          <a:p>
+            <a:r>
+              <a:rPr sz="900" b="0" i="0">
+                <a:solidFill>
+                  <a:srgbClr val="595959"/>
+                </a:solidFill>
+                <a:latin typeface="Arial"/>
+              </a:rPr>
+              <a:t>2.2 · The shared vocabulary that makes re-use possible</a:t>
+            </a:r>
+          </a:p>
+        </p:txBody>
+      </p:sp>
+    </p:spTree>
+  </p:cSld>
+  <p:clrMapOvr>
+    <a:masterClrMapping/>
+  </p:clrMapOvr>
+</p:sld>
+</file>
+
+<file path=ppt/slides/slide18.xml><?xml version="1.0" encoding="utf-8"?>
+<p:sld xmlns:a="http://schemas.openxmlformats.org/drawingml/2006/main" xmlns:p="http://schemas.openxmlformats.org/presentationml/2006/main" xmlns:r="http://schemas.openxmlformats.org/officeDocument/2006/relationships">
+  <p:cSld>
+    <p:spTree>
+      <p:nvGrpSpPr>
+        <p:cNvPr id="1" name=""/>
+        <p:cNvGrpSpPr/>
+        <p:nvPr/>
+      </p:nvGrpSpPr>
+      <p:grpSpPr/>
+      <p:sp>
+        <p:nvSpPr>
           <p:cNvPr id="2" name="TextBox 1"/>
           <p:cNvSpPr txBox="1"/>
           <p:nvPr/>
@@ -15742,7 +15311,7 @@
 </p:sld>
 </file>
 
-<file path=ppt/slides/slide17.xml><?xml version="1.0" encoding="utf-8"?>
+<file path=ppt/slides/slide19.xml><?xml version="1.0" encoding="utf-8"?>
 <p:sld xmlns:a="http://schemas.openxmlformats.org/drawingml/2006/main" xmlns:p="http://schemas.openxmlformats.org/presentationml/2006/main" xmlns:r="http://schemas.openxmlformats.org/officeDocument/2006/relationships">
   <p:cSld>
     <p:spTree>

--- a/10-Knowledge-Products/KP1-GEA/videos/module_2/en/decks/KP1_M2_2.2_Deck_v0.2.pptx
+++ b/10-Knowledge-Products/KP1-GEA/videos/module_2/en/decks/KP1_M2_2.2_Deck_v0.2.pptx
@@ -11860,7 +11860,7 @@
                 </a:solidFill>
                 <a:latin typeface="Arial"/>
               </a:rPr>
-              <a:t>~5 minutes · standalone video · voice-over on text slides</a:t>
+              <a:t>standalone video · voice-over on text slides</a:t>
             </a:r>
           </a:p>
         </p:txBody>

--- a/10-Knowledge-Products/KP1-GEA/videos/module_2/en/decks/KP1_M2_2.2_Deck_v0.2.pptx
+++ b/10-Knowledge-Products/KP1-GEA/videos/module_2/en/decks/KP1_M2_2.2_Deck_v0.2.pptx
@@ -11724,7 +11724,7 @@
                 </a:solidFill>
                 <a:latin typeface="Arial"/>
               </a:rPr>
-              <a:t>KP1 · MODULE 2 · VIDEO 2.2</a:t>
+              <a:t>MODULE 2 · VIDEO 2.2</a:t>
             </a:r>
           </a:p>
         </p:txBody>
